--- a/build/pptx/practice-defense-draft.pptx
+++ b/build/pptx/practice-defense-draft.pptx
@@ -13,6 +13,7 @@
     <p:sldId id="261" r:id="rId7"/>
     <p:sldId id="262" r:id="rId8"/>
     <p:sldId id="263" r:id="rId9"/>
+    <p:sldId id="264" r:id="rId10"/>
   </p:sldIdLst>
   <p:sldSz cx="12192000" cy="6858000" type="wide"/>
   <p:notesSz cx="6858000" cy="9144000"/>
@@ -384,7 +385,44 @@
                 <a:latin typeface="Aptos"/>
                 <a:cs typeface="Aptos"/>
               </a:rPr>
-              <a:t>Проблема: single-node SignalR теряет события между узлами</a:t>
+              <a:t>Проблема и цель</a:t>
+            </a:r>
+          </a:p>
+        </p:txBody>
+      </p:sp>
+      <p:sp>
+        <p:nvSpPr>
+          <p:cNvPr id="11" name="Shape 11"/>
+          <p:cNvSpPr txBox="1"/>
+          <p:nvPr/>
+        </p:nvSpPr>
+        <p:spPr>
+          <a:xfrm>
+            <a:off x="621792" y="987552"/>
+            <a:ext cx="9875520" cy="320040"/>
+          </a:xfrm>
+          <a:prstGeom prst="roundRect">
+            <a:avLst/>
+          </a:prstGeom>
+          <a:noFill/>
+          <a:ln>
+            <a:noFill/>
+          </a:ln>
+        </p:spPr>
+        <p:txBody>
+          <a:bodyPr wrap="square" lIns="177800" tIns="177800" rIns="177800" bIns="177800"/>
+          <a:lstStyle/>
+          <a:p>
+            <a:pPr algn="l"/>
+            <a:r>
+              <a:rPr lang="ru-RU" sz="1300" b="0">
+                <a:solidFill>
+                  <a:srgbClr val="5E6A75"/>
+                </a:solidFill>
+                <a:latin typeface="Aptos"/>
+                <a:cs typeface="Aptos"/>
+              </a:rPr>
+              <a:t>Single-node SignalR ограничивает горизонтальное масштабирование</a:t>
             </a:r>
           </a:p>
         </p:txBody>
@@ -397,8 +435,8 @@
         </p:nvSpPr>
         <p:spPr>
           <a:xfrm>
-            <a:off x="685800" y="1554480"/>
-            <a:ext cx="5212080" cy="2377440"/>
+            <a:off x="685800" y="1508760"/>
+            <a:ext cx="5349240" cy="4206240"/>
           </a:xfrm>
           <a:prstGeom prst="roundRect">
             <a:avLst/>
@@ -418,40 +456,92 @@
           <a:p>
             <a:pPr algn="l"/>
             <a:r>
-              <a:rPr lang="ru-RU" sz="1800" b="0">
-                <a:solidFill>
-                  <a:srgbClr val="18212B"/>
-                </a:solidFill>
-                <a:latin typeface="Aptos"/>
-                <a:cs typeface="Aptos"/>
-              </a:rPr>
-              <a:t>Без межузлового канала</a:t>
-            </a:r>
-          </a:p>
-          <a:p>
-            <a:pPr algn="l"/>
-            <a:r>
-              <a:rPr lang="ru-RU" sz="1800" b="0">
-                <a:solidFill>
-                  <a:srgbClr val="18212B"/>
-                </a:solidFill>
-                <a:latin typeface="Aptos"/>
-                <a:cs typeface="Aptos"/>
-              </a:rPr>
-              <a:t>Каждый экземпляр знает только своих клиентов.</a:t>
-            </a:r>
-          </a:p>
-          <a:p>
-            <a:pPr algn="l"/>
-            <a:r>
-              <a:rPr lang="ru-RU" sz="1800" b="0">
-                <a:solidFill>
-                  <a:srgbClr val="18212B"/>
-                </a:solidFill>
-                <a:latin typeface="Aptos"/>
-                <a:cs typeface="Aptos"/>
-              </a:rPr>
-              <a:t>Событие, созданное на одном узле, не доходит до клиента на другом.</a:t>
+              <a:rPr lang="ru-RU" sz="1600" b="0">
+                <a:solidFill>
+                  <a:srgbClr val="18212B"/>
+                </a:solidFill>
+                <a:latin typeface="Aptos"/>
+                <a:cs typeface="Aptos"/>
+              </a:rPr>
+              <a:t>Проблема</a:t>
+            </a:r>
+          </a:p>
+          <a:p>
+            <a:pPr algn="l"/>
+            <a:r>
+              <a:rPr lang="ru-RU" sz="1600" b="0">
+                <a:solidFill>
+                  <a:srgbClr val="18212B"/>
+                </a:solidFill>
+                <a:latin typeface="Aptos"/>
+                <a:cs typeface="Aptos"/>
+              </a:rPr>
+              <a:t/>
+            </a:r>
+          </a:p>
+          <a:p>
+            <a:pPr algn="l"/>
+            <a:r>
+              <a:rPr lang="ru-RU" sz="1600" b="0">
+                <a:solidFill>
+                  <a:srgbClr val="18212B"/>
+                </a:solidFill>
+                <a:latin typeface="Aptos"/>
+                <a:cs typeface="Aptos"/>
+              </a:rPr>
+              <a:t>Сведения о подключениях и группах SignalR хранятся в памяти процесса.</a:t>
+            </a:r>
+          </a:p>
+          <a:p>
+            <a:pPr algn="l"/>
+            <a:r>
+              <a:rPr lang="ru-RU" sz="1600" b="0">
+                <a:solidFill>
+                  <a:srgbClr val="18212B"/>
+                </a:solidFill>
+                <a:latin typeface="Aptos"/>
+                <a:cs typeface="Aptos"/>
+              </a:rPr>
+              <a:t/>
+            </a:r>
+          </a:p>
+          <a:p>
+            <a:pPr algn="l"/>
+            <a:r>
+              <a:rPr lang="ru-RU" sz="1600" b="0">
+                <a:solidFill>
+                  <a:srgbClr val="18212B"/>
+                </a:solidFill>
+                <a:latin typeface="Aptos"/>
+                <a:cs typeface="Aptos"/>
+              </a:rPr>
+              <a:t>При нескольких экземплярах backend событие, созданное на одном узле, не доходит до клиента, подключенного к другому узлу.</a:t>
+            </a:r>
+          </a:p>
+          <a:p>
+            <a:pPr algn="l"/>
+            <a:r>
+              <a:rPr lang="ru-RU" sz="1600" b="0">
+                <a:solidFill>
+                  <a:srgbClr val="18212B"/>
+                </a:solidFill>
+                <a:latin typeface="Aptos"/>
+                <a:cs typeface="Aptos"/>
+              </a:rPr>
+              <a:t/>
+            </a:r>
+          </a:p>
+          <a:p>
+            <a:pPr algn="l"/>
+            <a:r>
+              <a:rPr lang="ru-RU" sz="1600" b="0">
+                <a:solidFill>
+                  <a:srgbClr val="18212B"/>
+                </a:solidFill>
+                <a:latin typeface="Aptos"/>
+                <a:cs typeface="Aptos"/>
+              </a:rPr>
+              <a:t>Real-time пространство фрагментируется на независимые острова.</a:t>
             </a:r>
           </a:p>
         </p:txBody>
@@ -464,8 +554,8 @@
         </p:nvSpPr>
         <p:spPr>
           <a:xfrm>
-            <a:off x="6172200" y="1554480"/>
-            <a:ext cx="5212080" cy="2377440"/>
+            <a:off x="6172200" y="1508760"/>
+            <a:ext cx="5349240" cy="4206240"/>
           </a:xfrm>
           <a:prstGeom prst="roundRect">
             <a:avLst/>
@@ -485,27 +575,40 @@
           <a:p>
             <a:pPr algn="l"/>
             <a:r>
-              <a:rPr lang="ru-RU" sz="1800" b="1">
-                <a:solidFill>
-                  <a:srgbClr val="18212B"/>
-                </a:solidFill>
-                <a:latin typeface="Aptos"/>
-                <a:cs typeface="Aptos"/>
-              </a:rPr>
-              <a:t>Цель работы</a:t>
-            </a:r>
-          </a:p>
-          <a:p>
-            <a:pPr algn="l"/>
-            <a:r>
-              <a:rPr lang="ru-RU" sz="1800" b="1">
-                <a:solidFill>
-                  <a:srgbClr val="18212B"/>
-                </a:solidFill>
-                <a:latin typeface="Aptos"/>
-                <a:cs typeface="Aptos"/>
-              </a:rPr>
-              <a:t>Восстановить корректную доставку событий между клиентами, подключенными к разным экземплярам backend-сервиса.</a:t>
+              <a:rPr lang="ru-RU" sz="1600" b="1">
+                <a:solidFill>
+                  <a:srgbClr val="18212B"/>
+                </a:solidFill>
+                <a:latin typeface="Aptos"/>
+                <a:cs typeface="Aptos"/>
+              </a:rPr>
+              <a:t>Цель преддипломной практики</a:t>
+            </a:r>
+          </a:p>
+          <a:p>
+            <a:pPr algn="l"/>
+            <a:r>
+              <a:rPr lang="ru-RU" sz="1600" b="1">
+                <a:solidFill>
+                  <a:srgbClr val="18212B"/>
+                </a:solidFill>
+                <a:latin typeface="Aptos"/>
+                <a:cs typeface="Aptos"/>
+              </a:rPr>
+              <a:t/>
+            </a:r>
+          </a:p>
+          <a:p>
+            <a:pPr algn="l"/>
+            <a:r>
+              <a:rPr lang="ru-RU" sz="1600" b="1">
+                <a:solidFill>
+                  <a:srgbClr val="18212B"/>
+                </a:solidFill>
+                <a:latin typeface="Aptos"/>
+                <a:cs typeface="Aptos"/>
+              </a:rPr>
+              <a:t>Real-time интерфейс системы отслеживания задач, в котором WebSocket-соединения обслуживаются несколькими экземплярами app-api, а события об изменении сущностей доставляются клиентам независимо от узла подключения.</a:t>
             </a:r>
           </a:p>
         </p:txBody>
@@ -612,7 +715,44 @@
                 <a:latin typeface="Aptos"/>
                 <a:cs typeface="Aptos"/>
               </a:rPr>
-              <a:t>Целевая архитектура</a:t>
+              <a:t>Анализ подходов к масштабированию</a:t>
+            </a:r>
+          </a:p>
+        </p:txBody>
+      </p:sp>
+      <p:sp>
+        <p:nvSpPr>
+          <p:cNvPr id="11" name="Shape 11"/>
+          <p:cNvSpPr txBox="1"/>
+          <p:nvPr/>
+        </p:nvSpPr>
+        <p:spPr>
+          <a:xfrm>
+            <a:off x="621792" y="987552"/>
+            <a:ext cx="9875520" cy="320040"/>
+          </a:xfrm>
+          <a:prstGeom prst="roundRect">
+            <a:avLst/>
+          </a:prstGeom>
+          <a:noFill/>
+          <a:ln>
+            <a:noFill/>
+          </a:ln>
+        </p:spPr>
+        <p:txBody>
+          <a:bodyPr wrap="square" lIns="177800" tIns="177800" rIns="177800" bIns="177800"/>
+          <a:lstStyle/>
+          <a:p>
+            <a:pPr algn="l"/>
+            <a:r>
+              <a:rPr lang="ru-RU" sz="1300" b="0">
+                <a:solidFill>
+                  <a:srgbClr val="5E6A75"/>
+                </a:solidFill>
+                <a:latin typeface="Aptos"/>
+                <a:cs typeface="Aptos"/>
+              </a:rPr>
+              <a:t>Шесть рассмотренных вариантов; обоснован выбор Redis backplane</a:t>
             </a:r>
           </a:p>
         </p:txBody>
@@ -625,8 +765,8 @@
         </p:nvSpPr>
         <p:spPr>
           <a:xfrm>
-            <a:off x="640080" y="1691640"/>
-            <a:ext cx="1828800" cy="640080"/>
+            <a:off x="685800" y="1554480"/>
+            <a:ext cx="3657600" cy="1325880"/>
           </a:xfrm>
           <a:prstGeom prst="roundRect">
             <a:avLst/>
@@ -644,16 +784,29 @@
           <a:bodyPr wrap="square" lIns="177800" tIns="177800" rIns="177800" bIns="177800"/>
           <a:lstStyle/>
           <a:p>
-            <a:pPr algn="ctr"/>
-            <a:r>
-              <a:rPr lang="ru-RU" sz="1400" b="1">
-                <a:solidFill>
-                  <a:srgbClr val="18212B"/>
-                </a:solidFill>
-                <a:latin typeface="Aptos"/>
-                <a:cs typeface="Aptos"/>
-              </a:rPr>
-              <a:t>Клиент A</a:t>
+            <a:pPr algn="l"/>
+            <a:r>
+              <a:rPr lang="ru-RU" sz="1300" b="0">
+                <a:solidFill>
+                  <a:srgbClr val="18212B"/>
+                </a:solidFill>
+                <a:latin typeface="Aptos"/>
+                <a:cs typeface="Aptos"/>
+              </a:rPr>
+              <a:t>Один экземпляр backend</a:t>
+            </a:r>
+          </a:p>
+          <a:p>
+            <a:pPr algn="l"/>
+            <a:r>
+              <a:rPr lang="ru-RU" sz="1300" b="0">
+                <a:solidFill>
+                  <a:srgbClr val="18212B"/>
+                </a:solidFill>
+                <a:latin typeface="Aptos"/>
+                <a:cs typeface="Aptos"/>
+              </a:rPr>
+              <a:t>Нет масштабирования; один узел — точка отказа</a:t>
             </a:r>
           </a:p>
         </p:txBody>
@@ -666,8 +819,8 @@
         </p:nvSpPr>
         <p:spPr>
           <a:xfrm>
-            <a:off x="640080" y="3246120"/>
-            <a:ext cx="1828800" cy="640080"/>
+            <a:off x="4434840" y="1554480"/>
+            <a:ext cx="3657600" cy="1325880"/>
           </a:xfrm>
           <a:prstGeom prst="roundRect">
             <a:avLst/>
@@ -685,16 +838,29 @@
           <a:bodyPr wrap="square" lIns="177800" tIns="177800" rIns="177800" bIns="177800"/>
           <a:lstStyle/>
           <a:p>
-            <a:pPr algn="ctr"/>
-            <a:r>
-              <a:rPr lang="ru-RU" sz="1400" b="1">
-                <a:solidFill>
-                  <a:srgbClr val="18212B"/>
-                </a:solidFill>
-                <a:latin typeface="Aptos"/>
-                <a:cs typeface="Aptos"/>
-              </a:rPr>
-              <a:t>Клиент B</a:t>
+            <a:pPr algn="l"/>
+            <a:r>
+              <a:rPr lang="ru-RU" sz="1300" b="0">
+                <a:solidFill>
+                  <a:srgbClr val="18212B"/>
+                </a:solidFill>
+                <a:latin typeface="Aptos"/>
+                <a:cs typeface="Aptos"/>
+              </a:rPr>
+              <a:t>Несколько экземпляров без backplane</a:t>
+            </a:r>
+          </a:p>
+          <a:p>
+            <a:pPr algn="l"/>
+            <a:r>
+              <a:rPr lang="ru-RU" sz="1300" b="0">
+                <a:solidFill>
+                  <a:srgbClr val="18212B"/>
+                </a:solidFill>
+                <a:latin typeface="Aptos"/>
+                <a:cs typeface="Aptos"/>
+              </a:rPr>
+              <a:t>Real-time пространство фрагментируется по узлам</a:t>
             </a:r>
           </a:p>
         </p:txBody>
@@ -707,8 +873,170 @@
         </p:nvSpPr>
         <p:spPr>
           <a:xfrm>
-            <a:off x="3108960" y="2468880"/>
-            <a:ext cx="1554480" cy="777240"/>
+            <a:off x="8183880" y="1554480"/>
+            <a:ext cx="3657600" cy="1325880"/>
+          </a:xfrm>
+          <a:prstGeom prst="roundRect">
+            <a:avLst/>
+          </a:prstGeom>
+          <a:solidFill>
+            <a:srgbClr val="FFFFFF"/>
+          </a:solidFill>
+          <a:ln w="12700">
+            <a:solidFill>
+              <a:srgbClr val="D7D2C7"/>
+            </a:solidFill>
+          </a:ln>
+        </p:spPr>
+        <p:txBody>
+          <a:bodyPr wrap="square" lIns="177800" tIns="177800" rIns="177800" bIns="177800"/>
+          <a:lstStyle/>
+          <a:p>
+            <a:pPr algn="l"/>
+            <a:r>
+              <a:rPr lang="ru-RU" sz="1300" b="0">
+                <a:solidFill>
+                  <a:srgbClr val="18212B"/>
+                </a:solidFill>
+                <a:latin typeface="Aptos"/>
+                <a:cs typeface="Aptos"/>
+              </a:rPr>
+              <a:t>Sticky sessions</a:t>
+            </a:r>
+          </a:p>
+          <a:p>
+            <a:pPr algn="l"/>
+            <a:r>
+              <a:rPr lang="ru-RU" sz="1300" b="0">
+                <a:solidFill>
+                  <a:srgbClr val="18212B"/>
+                </a:solidFill>
+                <a:latin typeface="Aptos"/>
+                <a:cs typeface="Aptos"/>
+              </a:rPr>
+              <a:t>Удерживают клиента на узле, но не доставляют события на другие</a:t>
+            </a:r>
+          </a:p>
+        </p:txBody>
+      </p:sp>
+      <p:sp>
+        <p:nvSpPr>
+          <p:cNvPr id="23" name="Shape 23"/>
+          <p:cNvSpPr txBox="1"/>
+          <p:nvPr/>
+        </p:nvSpPr>
+        <p:spPr>
+          <a:xfrm>
+            <a:off x="685800" y="3017520"/>
+            <a:ext cx="3657600" cy="1325880"/>
+          </a:xfrm>
+          <a:prstGeom prst="roundRect">
+            <a:avLst/>
+          </a:prstGeom>
+          <a:solidFill>
+            <a:srgbClr val="FFFFFF"/>
+          </a:solidFill>
+          <a:ln w="12700">
+            <a:solidFill>
+              <a:srgbClr val="D7D2C7"/>
+            </a:solidFill>
+          </a:ln>
+        </p:spPr>
+        <p:txBody>
+          <a:bodyPr wrap="square" lIns="177800" tIns="177800" rIns="177800" bIns="177800"/>
+          <a:lstStyle/>
+          <a:p>
+            <a:pPr algn="l"/>
+            <a:r>
+              <a:rPr lang="ru-RU" sz="1300" b="0">
+                <a:solidFill>
+                  <a:srgbClr val="18212B"/>
+                </a:solidFill>
+                <a:latin typeface="Aptos"/>
+                <a:cs typeface="Aptos"/>
+              </a:rPr>
+              <a:t>Broker / event bus</a:t>
+            </a:r>
+          </a:p>
+          <a:p>
+            <a:pPr algn="l"/>
+            <a:r>
+              <a:rPr lang="ru-RU" sz="1300" b="0">
+                <a:solidFill>
+                  <a:srgbClr val="18212B"/>
+                </a:solidFill>
+                <a:latin typeface="Aptos"/>
+                <a:cs typeface="Aptos"/>
+              </a:rPr>
+              <a:t>Даёт межузловую доставку, но требует схем событий и persistence</a:t>
+            </a:r>
+          </a:p>
+        </p:txBody>
+      </p:sp>
+      <p:sp>
+        <p:nvSpPr>
+          <p:cNvPr id="24" name="Shape 24"/>
+          <p:cNvSpPr txBox="1"/>
+          <p:nvPr/>
+        </p:nvSpPr>
+        <p:spPr>
+          <a:xfrm>
+            <a:off x="4434840" y="3017520"/>
+            <a:ext cx="3657600" cy="1325880"/>
+          </a:xfrm>
+          <a:prstGeom prst="roundRect">
+            <a:avLst/>
+          </a:prstGeom>
+          <a:solidFill>
+            <a:srgbClr val="FFFFFF"/>
+          </a:solidFill>
+          <a:ln w="12700">
+            <a:solidFill>
+              <a:srgbClr val="D7D2C7"/>
+            </a:solidFill>
+          </a:ln>
+        </p:spPr>
+        <p:txBody>
+          <a:bodyPr wrap="square" lIns="177800" tIns="177800" rIns="177800" bIns="177800"/>
+          <a:lstStyle/>
+          <a:p>
+            <a:pPr algn="l"/>
+            <a:r>
+              <a:rPr lang="ru-RU" sz="1300" b="0">
+                <a:solidFill>
+                  <a:srgbClr val="18212B"/>
+                </a:solidFill>
+                <a:latin typeface="Aptos"/>
+                <a:cs typeface="Aptos"/>
+              </a:rPr>
+              <a:t>Managed real-time service</a:t>
+            </a:r>
+          </a:p>
+          <a:p>
+            <a:pPr algn="l"/>
+            <a:r>
+              <a:rPr lang="ru-RU" sz="1300" b="0">
+                <a:solidFill>
+                  <a:srgbClr val="18212B"/>
+                </a:solidFill>
+                <a:latin typeface="Aptos"/>
+                <a:cs typeface="Aptos"/>
+              </a:rPr>
+              <a:t>Уменьшает контроль над self-hosted контуром</a:t>
+            </a:r>
+          </a:p>
+        </p:txBody>
+      </p:sp>
+      <p:sp>
+        <p:nvSpPr>
+          <p:cNvPr id="25" name="Shape 25"/>
+          <p:cNvSpPr txBox="1"/>
+          <p:nvPr/>
+        </p:nvSpPr>
+        <p:spPr>
+          <a:xfrm>
+            <a:off x="8183880" y="3017520"/>
+            <a:ext cx="3657600" cy="1325880"/>
           </a:xfrm>
           <a:prstGeom prst="roundRect">
             <a:avLst/>
@@ -726,139 +1054,29 @@
           <a:bodyPr wrap="square" lIns="177800" tIns="177800" rIns="177800" bIns="177800"/>
           <a:lstStyle/>
           <a:p>
-            <a:pPr algn="ctr"/>
-            <a:r>
-              <a:rPr lang="ru-RU" sz="1400" b="1">
-                <a:solidFill>
-                  <a:srgbClr val="18212B"/>
-                </a:solidFill>
-                <a:latin typeface="Aptos"/>
-                <a:cs typeface="Aptos"/>
-              </a:rPr>
-              <a:t>nginx</a:t>
-            </a:r>
-          </a:p>
-        </p:txBody>
-      </p:sp>
-      <p:sp>
-        <p:nvSpPr>
-          <p:cNvPr id="23" name="Shape 23"/>
-          <p:cNvSpPr txBox="1"/>
-          <p:nvPr/>
-        </p:nvSpPr>
-        <p:spPr>
-          <a:xfrm>
-            <a:off x="5303520" y="1691640"/>
-            <a:ext cx="1920240" cy="640080"/>
-          </a:xfrm>
-          <a:prstGeom prst="roundRect">
-            <a:avLst/>
-          </a:prstGeom>
-          <a:solidFill>
-            <a:srgbClr val="FFFFFF"/>
-          </a:solidFill>
-          <a:ln w="12700">
-            <a:solidFill>
-              <a:srgbClr val="D7D2C7"/>
-            </a:solidFill>
-          </a:ln>
-        </p:spPr>
-        <p:txBody>
-          <a:bodyPr wrap="square" lIns="177800" tIns="177800" rIns="177800" bIns="177800"/>
-          <a:lstStyle/>
-          <a:p>
-            <a:pPr algn="ctr"/>
-            <a:r>
-              <a:rPr lang="ru-RU" sz="1400" b="1">
-                <a:solidFill>
-                  <a:srgbClr val="18212B"/>
-                </a:solidFill>
-                <a:latin typeface="Aptos"/>
-                <a:cs typeface="Aptos"/>
-              </a:rPr>
-              <a:t>app-api-1</a:t>
-            </a:r>
-          </a:p>
-        </p:txBody>
-      </p:sp>
-      <p:sp>
-        <p:nvSpPr>
-          <p:cNvPr id="24" name="Shape 24"/>
-          <p:cNvSpPr txBox="1"/>
-          <p:nvPr/>
-        </p:nvSpPr>
-        <p:spPr>
-          <a:xfrm>
-            <a:off x="5303520" y="3246120"/>
-            <a:ext cx="1920240" cy="640080"/>
-          </a:xfrm>
-          <a:prstGeom prst="roundRect">
-            <a:avLst/>
-          </a:prstGeom>
-          <a:solidFill>
-            <a:srgbClr val="FFFFFF"/>
-          </a:solidFill>
-          <a:ln w="12700">
-            <a:solidFill>
-              <a:srgbClr val="D7D2C7"/>
-            </a:solidFill>
-          </a:ln>
-        </p:spPr>
-        <p:txBody>
-          <a:bodyPr wrap="square" lIns="177800" tIns="177800" rIns="177800" bIns="177800"/>
-          <a:lstStyle/>
-          <a:p>
-            <a:pPr algn="ctr"/>
-            <a:r>
-              <a:rPr lang="ru-RU" sz="1400" b="1">
-                <a:solidFill>
-                  <a:srgbClr val="18212B"/>
-                </a:solidFill>
-                <a:latin typeface="Aptos"/>
-                <a:cs typeface="Aptos"/>
-              </a:rPr>
-              <a:t>app-api-2</a:t>
-            </a:r>
-          </a:p>
-        </p:txBody>
-      </p:sp>
-      <p:sp>
-        <p:nvSpPr>
-          <p:cNvPr id="25" name="Shape 25"/>
-          <p:cNvSpPr txBox="1"/>
-          <p:nvPr/>
-        </p:nvSpPr>
-        <p:spPr>
-          <a:xfrm>
-            <a:off x="7818120" y="2468880"/>
-            <a:ext cx="2286000" cy="777240"/>
-          </a:xfrm>
-          <a:prstGeom prst="roundRect">
-            <a:avLst/>
-          </a:prstGeom>
-          <a:solidFill>
-            <a:srgbClr val="E8F3F1"/>
-          </a:solidFill>
-          <a:ln w="12700">
-            <a:solidFill>
-              <a:srgbClr val="0B6E69"/>
-            </a:solidFill>
-          </a:ln>
-        </p:spPr>
-        <p:txBody>
-          <a:bodyPr wrap="square" lIns="177800" tIns="177800" rIns="177800" bIns="177800"/>
-          <a:lstStyle/>
-          <a:p>
-            <a:pPr algn="ctr"/>
-            <a:r>
-              <a:rPr lang="ru-RU" sz="1400" b="1">
-                <a:solidFill>
-                  <a:srgbClr val="18212B"/>
-                </a:solidFill>
-                <a:latin typeface="Aptos"/>
-                <a:cs typeface="Aptos"/>
-              </a:rPr>
-              <a:t>Redis backplane</a:t>
+            <a:pPr algn="l"/>
+            <a:r>
+              <a:rPr lang="ru-RU" sz="1300" b="1">
+                <a:solidFill>
+                  <a:srgbClr val="18212B"/>
+                </a:solidFill>
+                <a:latin typeface="Aptos"/>
+                <a:cs typeface="Aptos"/>
+              </a:rPr>
+              <a:t>Redis backplane для SignalR — выбрано</a:t>
+            </a:r>
+          </a:p>
+          <a:p>
+            <a:pPr algn="l"/>
+            <a:r>
+              <a:rPr lang="ru-RU" sz="1300" b="1">
+                <a:solidFill>
+                  <a:srgbClr val="18212B"/>
+                </a:solidFill>
+                <a:latin typeface="Aptos"/>
+                <a:cs typeface="Aptos"/>
+              </a:rPr>
+              <a:t>self-hosted, без перестройки логики, transient pub/sub</a:t>
             </a:r>
           </a:p>
         </p:txBody>
@@ -871,8 +1089,8 @@
         </p:nvSpPr>
         <p:spPr>
           <a:xfrm>
-            <a:off x="640080" y="4754880"/>
-            <a:ext cx="10515600" cy="502920"/>
+            <a:off x="685800" y="4617720"/>
+            <a:ext cx="11155680" cy="1280160"/>
           </a:xfrm>
           <a:prstGeom prst="roundRect">
             <a:avLst/>
@@ -886,16 +1104,16 @@
           <a:bodyPr wrap="square" lIns="177800" tIns="177800" rIns="177800" bIns="177800"/>
           <a:lstStyle/>
           <a:p>
-            <a:pPr algn="ctr"/>
-            <a:r>
-              <a:rPr lang="ru-RU" sz="1400" b="0">
+            <a:pPr algn="l"/>
+            <a:r>
+              <a:rPr lang="ru-RU" sz="1200" b="0">
                 <a:solidFill>
                   <a:srgbClr val="5E6A75"/>
                 </a:solidFill>
                 <a:latin typeface="Aptos"/>
                 <a:cs typeface="Aptos"/>
               </a:rPr>
-              <a:t>SignalR-события публикуются между экземплярами через Redis; группы остаются локальным runtime-состоянием.</a:t>
+              <a:t>Критерии выбора: совместимость с self-hosted стендом, минимальная перестройка доменной логики, наличие штатной поддержки в ASP.NET Core SignalR, пригодность для transient UI-событий и воспроизводимость на локальном Docker Compose стенде.</a:t>
             </a:r>
           </a:p>
         </p:txBody>
@@ -1002,7 +1220,44 @@
                 <a:latin typeface="Aptos"/>
                 <a:cs typeface="Aptos"/>
               </a:rPr>
-              <a:t>Что сделано</a:t>
+              <a:t>Целевая архитектура</a:t>
+            </a:r>
+          </a:p>
+        </p:txBody>
+      </p:sp>
+      <p:sp>
+        <p:nvSpPr>
+          <p:cNvPr id="11" name="Shape 11"/>
+          <p:cNvSpPr txBox="1"/>
+          <p:nvPr/>
+        </p:nvSpPr>
+        <p:spPr>
+          <a:xfrm>
+            <a:off x="621792" y="987552"/>
+            <a:ext cx="9875520" cy="320040"/>
+          </a:xfrm>
+          <a:prstGeom prst="roundRect">
+            <a:avLst/>
+          </a:prstGeom>
+          <a:noFill/>
+          <a:ln>
+            <a:noFill/>
+          </a:ln>
+        </p:spPr>
+        <p:txBody>
+          <a:bodyPr wrap="square" lIns="177800" tIns="177800" rIns="177800" bIns="177800"/>
+          <a:lstStyle/>
+          <a:p>
+            <a:pPr algn="l"/>
+            <a:r>
+              <a:rPr lang="ru-RU" sz="1300" b="0">
+                <a:solidFill>
+                  <a:srgbClr val="5E6A75"/>
+                </a:solidFill>
+                <a:latin typeface="Aptos"/>
+                <a:cs typeface="Aptos"/>
+              </a:rPr>
+              <a:t>Два экземпляра app-api за nginx, общий Redis backplane для межузловой доставки</a:t>
             </a:r>
           </a:p>
         </p:txBody>
@@ -1015,8 +1270,8 @@
         </p:nvSpPr>
         <p:spPr>
           <a:xfrm>
-            <a:off x="685800" y="1554480"/>
-            <a:ext cx="5212080" cy="1097280"/>
+            <a:off x="914400" y="1874520"/>
+            <a:ext cx="1645920" cy="640080"/>
           </a:xfrm>
           <a:prstGeom prst="roundRect">
             <a:avLst/>
@@ -1034,29 +1289,16 @@
           <a:bodyPr wrap="square" lIns="177800" tIns="177800" rIns="177800" bIns="177800"/>
           <a:lstStyle/>
           <a:p>
-            <a:pPr algn="l"/>
-            <a:r>
-              <a:rPr lang="ru-RU" sz="1500" b="0">
-                <a:solidFill>
-                  <a:srgbClr val="18212B"/>
-                </a:solidFill>
-                <a:latin typeface="Aptos"/>
-                <a:cs typeface="Aptos"/>
-              </a:rPr>
-              <a:t>1 · Redis backplane для SignalR</a:t>
-            </a:r>
-          </a:p>
-          <a:p>
-            <a:pPr algn="l"/>
-            <a:r>
-              <a:rPr lang="ru-RU" sz="1500" b="0">
-                <a:solidFill>
-                  <a:srgbClr val="18212B"/>
-                </a:solidFill>
-                <a:latin typeface="Aptos"/>
-                <a:cs typeface="Aptos"/>
-              </a:rPr>
-              <a:t>Конфигурируется через REDIS_CONNECTION_STRING</a:t>
+            <a:pPr algn="ctr"/>
+            <a:r>
+              <a:rPr lang="ru-RU" sz="1400" b="1">
+                <a:solidFill>
+                  <a:srgbClr val="18212B"/>
+                </a:solidFill>
+                <a:latin typeface="Aptos"/>
+                <a:cs typeface="Aptos"/>
+              </a:rPr>
+              <a:t>Клиент A</a:t>
             </a:r>
           </a:p>
         </p:txBody>
@@ -1069,8 +1311,8 @@
         </p:nvSpPr>
         <p:spPr>
           <a:xfrm>
-            <a:off x="685800" y="2743200"/>
-            <a:ext cx="5212080" cy="1097280"/>
+            <a:off x="914400" y="3749040"/>
+            <a:ext cx="1645920" cy="640080"/>
           </a:xfrm>
           <a:prstGeom prst="roundRect">
             <a:avLst/>
@@ -1088,29 +1330,16 @@
           <a:bodyPr wrap="square" lIns="177800" tIns="177800" rIns="177800" bIns="177800"/>
           <a:lstStyle/>
           <a:p>
-            <a:pPr algn="l"/>
-            <a:r>
-              <a:rPr lang="ru-RU" sz="1500" b="0">
-                <a:solidFill>
-                  <a:srgbClr val="18212B"/>
-                </a:solidFill>
-                <a:latin typeface="Aptos"/>
-                <a:cs typeface="Aptos"/>
-              </a:rPr>
-              <a:t>2 · Диагностика узла</a:t>
-            </a:r>
-          </a:p>
-          <a:p>
-            <a:pPr algn="l"/>
-            <a:r>
-              <a:rPr lang="ru-RU" sz="1500" b="0">
-                <a:solidFill>
-                  <a:srgbClr val="18212B"/>
-                </a:solidFill>
-                <a:latin typeface="Aptos"/>
-                <a:cs typeface="Aptos"/>
-              </a:rPr>
-              <a:t>SERVER_INSTANCE_ID, connectionId, machineName</a:t>
+            <a:pPr algn="ctr"/>
+            <a:r>
+              <a:rPr lang="ru-RU" sz="1400" b="1">
+                <a:solidFill>
+                  <a:srgbClr val="18212B"/>
+                </a:solidFill>
+                <a:latin typeface="Aptos"/>
+                <a:cs typeface="Aptos"/>
+              </a:rPr>
+              <a:t>Клиент B</a:t>
             </a:r>
           </a:p>
         </p:txBody>
@@ -1123,8 +1352,49 @@
         </p:nvSpPr>
         <p:spPr>
           <a:xfrm>
-            <a:off x="6172200" y="1554480"/>
-            <a:ext cx="5212080" cy="1097280"/>
+            <a:off x="3291840" y="2788920"/>
+            <a:ext cx="1371600" cy="731520"/>
+          </a:xfrm>
+          <a:prstGeom prst="roundRect">
+            <a:avLst/>
+          </a:prstGeom>
+          <a:solidFill>
+            <a:srgbClr val="E8F3F1"/>
+          </a:solidFill>
+          <a:ln w="12700">
+            <a:solidFill>
+              <a:srgbClr val="0B6E69"/>
+            </a:solidFill>
+          </a:ln>
+        </p:spPr>
+        <p:txBody>
+          <a:bodyPr wrap="square" lIns="177800" tIns="177800" rIns="177800" bIns="177800"/>
+          <a:lstStyle/>
+          <a:p>
+            <a:pPr algn="ctr"/>
+            <a:r>
+              <a:rPr lang="ru-RU" sz="1400" b="1">
+                <a:solidFill>
+                  <a:srgbClr val="18212B"/>
+                </a:solidFill>
+                <a:latin typeface="Aptos"/>
+                <a:cs typeface="Aptos"/>
+              </a:rPr>
+              <a:t>nginx</a:t>
+            </a:r>
+          </a:p>
+        </p:txBody>
+      </p:sp>
+      <p:sp>
+        <p:nvSpPr>
+          <p:cNvPr id="23" name="Shape 23"/>
+          <p:cNvSpPr txBox="1"/>
+          <p:nvPr/>
+        </p:nvSpPr>
+        <p:spPr>
+          <a:xfrm>
+            <a:off x="5577840" y="1874520"/>
+            <a:ext cx="1828800" cy="640080"/>
           </a:xfrm>
           <a:prstGeom prst="roundRect">
             <a:avLst/>
@@ -1134,7 +1404,7 @@
           </a:solidFill>
           <a:ln w="12700">
             <a:solidFill>
-              <a:srgbClr val="D7D2C7"/>
+              <a:srgbClr val="0B6E69"/>
             </a:solidFill>
           </a:ln>
         </p:spPr>
@@ -1142,43 +1412,30 @@
           <a:bodyPr wrap="square" lIns="177800" tIns="177800" rIns="177800" bIns="177800"/>
           <a:lstStyle/>
           <a:p>
-            <a:pPr algn="l"/>
-            <a:r>
-              <a:rPr lang="ru-RU" sz="1500" b="0">
-                <a:solidFill>
-                  <a:srgbClr val="18212B"/>
-                </a:solidFill>
-                <a:latin typeface="Aptos"/>
-                <a:cs typeface="Aptos"/>
-              </a:rPr>
-              <a:t>3 · Стенд Docker Compose</a:t>
-            </a:r>
-          </a:p>
-          <a:p>
-            <a:pPr algn="l"/>
-            <a:r>
-              <a:rPr lang="ru-RU" sz="1500" b="0">
-                <a:solidFill>
-                  <a:srgbClr val="18212B"/>
-                </a:solidFill>
-                <a:latin typeface="Aptos"/>
-                <a:cs typeface="Aptos"/>
-              </a:rPr>
-              <a:t>app-api-1, app-api-2, Redis, PostgreSQL, nginx</a:t>
-            </a:r>
-          </a:p>
-        </p:txBody>
-      </p:sp>
-      <p:sp>
-        <p:nvSpPr>
-          <p:cNvPr id="23" name="Shape 23"/>
-          <p:cNvSpPr txBox="1"/>
-          <p:nvPr/>
-        </p:nvSpPr>
-        <p:spPr>
-          <a:xfrm>
-            <a:off x="6172200" y="2743200"/>
-            <a:ext cx="5212080" cy="1097280"/>
+            <a:pPr algn="ctr"/>
+            <a:r>
+              <a:rPr lang="ru-RU" sz="1400" b="1">
+                <a:solidFill>
+                  <a:srgbClr val="18212B"/>
+                </a:solidFill>
+                <a:latin typeface="Aptos"/>
+                <a:cs typeface="Aptos"/>
+              </a:rPr>
+              <a:t>app-api-1</a:t>
+            </a:r>
+          </a:p>
+        </p:txBody>
+      </p:sp>
+      <p:sp>
+        <p:nvSpPr>
+          <p:cNvPr id="24" name="Shape 24"/>
+          <p:cNvSpPr txBox="1"/>
+          <p:nvPr/>
+        </p:nvSpPr>
+        <p:spPr>
+          <a:xfrm>
+            <a:off x="5577840" y="3749040"/>
+            <a:ext cx="1828800" cy="640080"/>
           </a:xfrm>
           <a:prstGeom prst="roundRect">
             <a:avLst/>
@@ -1188,7 +1445,7 @@
           </a:solidFill>
           <a:ln w="12700">
             <a:solidFill>
-              <a:srgbClr val="D7D2C7"/>
+              <a:srgbClr val="0B6E69"/>
             </a:solidFill>
           </a:ln>
         </p:spPr>
@@ -1196,29 +1453,265 @@
           <a:bodyPr wrap="square" lIns="177800" tIns="177800" rIns="177800" bIns="177800"/>
           <a:lstStyle/>
           <a:p>
-            <a:pPr algn="l"/>
-            <a:r>
-              <a:rPr lang="ru-RU" sz="1500" b="0">
-                <a:solidFill>
-                  <a:srgbClr val="18212B"/>
-                </a:solidFill>
-                <a:latin typeface="Aptos"/>
-                <a:cs typeface="Aptos"/>
-              </a:rPr>
-              <a:t>4 · Node.js-клиент</a:t>
-            </a:r>
-          </a:p>
-          <a:p>
-            <a:pPr algn="l"/>
-            <a:r>
-              <a:rPr lang="ru-RU" sz="1500" b="0">
-                <a:solidFill>
-                  <a:srgbClr val="18212B"/>
-                </a:solidFill>
-                <a:latin typeface="Aptos"/>
-                <a:cs typeface="Aptos"/>
-              </a:rPr>
-              <a:t>Delivery, серия, rejoin, failover</a:t>
+            <a:pPr algn="ctr"/>
+            <a:r>
+              <a:rPr lang="ru-RU" sz="1400" b="1">
+                <a:solidFill>
+                  <a:srgbClr val="18212B"/>
+                </a:solidFill>
+                <a:latin typeface="Aptos"/>
+                <a:cs typeface="Aptos"/>
+              </a:rPr>
+              <a:t>app-api-2</a:t>
+            </a:r>
+          </a:p>
+        </p:txBody>
+      </p:sp>
+      <p:sp>
+        <p:nvSpPr>
+          <p:cNvPr id="25" name="Shape 25"/>
+          <p:cNvSpPr txBox="1"/>
+          <p:nvPr/>
+        </p:nvSpPr>
+        <p:spPr>
+          <a:xfrm>
+            <a:off x="8321040" y="2788920"/>
+            <a:ext cx="2194560" cy="731520"/>
+          </a:xfrm>
+          <a:prstGeom prst="roundRect">
+            <a:avLst/>
+          </a:prstGeom>
+          <a:solidFill>
+            <a:srgbClr val="E8F3F1"/>
+          </a:solidFill>
+          <a:ln w="12700">
+            <a:solidFill>
+              <a:srgbClr val="0B6E69"/>
+            </a:solidFill>
+          </a:ln>
+        </p:spPr>
+        <p:txBody>
+          <a:bodyPr wrap="square" lIns="177800" tIns="177800" rIns="177800" bIns="177800"/>
+          <a:lstStyle/>
+          <a:p>
+            <a:pPr algn="ctr"/>
+            <a:r>
+              <a:rPr lang="ru-RU" sz="1400" b="1">
+                <a:solidFill>
+                  <a:srgbClr val="18212B"/>
+                </a:solidFill>
+                <a:latin typeface="Aptos"/>
+                <a:cs typeface="Aptos"/>
+              </a:rPr>
+              <a:t>Redis backplane</a:t>
+            </a:r>
+          </a:p>
+        </p:txBody>
+      </p:sp>
+      <p:cxnSp>
+        <p:nvCxnSpPr>
+          <p:cNvPr id="50" name="Connector 50"/>
+          <p:cNvCxnSpPr/>
+          <p:nvPr/>
+        </p:nvCxnSpPr>
+        <p:spPr>
+          <a:xfrm flipH="0" flipV="0">
+            <a:off x="2560320" y="2194560"/>
+            <a:ext cx="731520" cy="795528"/>
+          </a:xfrm>
+          <a:prstGeom prst="straightConnector1">
+            <a:avLst/>
+          </a:prstGeom>
+          <a:ln w="15875" cap="flat">
+            <a:solidFill>
+              <a:srgbClr val="0B6E69"/>
+            </a:solidFill>
+            <a:tailEnd type="triangle"/>
+          </a:ln>
+        </p:spPr>
+      </p:cxnSp>
+      <p:cxnSp>
+        <p:nvCxnSpPr>
+          <p:cNvPr id="51" name="Connector 51"/>
+          <p:cNvCxnSpPr/>
+          <p:nvPr/>
+        </p:nvCxnSpPr>
+        <p:spPr>
+          <a:xfrm flipH="0" flipV="1">
+            <a:off x="2560320" y="3319272"/>
+            <a:ext cx="731520" cy="749808"/>
+          </a:xfrm>
+          <a:prstGeom prst="straightConnector1">
+            <a:avLst/>
+          </a:prstGeom>
+          <a:ln w="15875" cap="flat">
+            <a:solidFill>
+              <a:srgbClr val="0B6E69"/>
+            </a:solidFill>
+            <a:tailEnd type="triangle"/>
+          </a:ln>
+        </p:spPr>
+      </p:cxnSp>
+      <p:cxnSp>
+        <p:nvCxnSpPr>
+          <p:cNvPr id="52" name="Connector 52"/>
+          <p:cNvCxnSpPr/>
+          <p:nvPr/>
+        </p:nvCxnSpPr>
+        <p:spPr>
+          <a:xfrm flipH="0" flipV="1">
+            <a:off x="4663440" y="2194560"/>
+            <a:ext cx="914400" cy="795528"/>
+          </a:xfrm>
+          <a:prstGeom prst="straightConnector1">
+            <a:avLst/>
+          </a:prstGeom>
+          <a:ln w="15875" cap="flat">
+            <a:solidFill>
+              <a:srgbClr val="0B6E69"/>
+            </a:solidFill>
+            <a:tailEnd type="triangle"/>
+          </a:ln>
+        </p:spPr>
+      </p:cxnSp>
+      <p:cxnSp>
+        <p:nvCxnSpPr>
+          <p:cNvPr id="53" name="Connector 53"/>
+          <p:cNvCxnSpPr/>
+          <p:nvPr/>
+        </p:nvCxnSpPr>
+        <p:spPr>
+          <a:xfrm flipH="0" flipV="0">
+            <a:off x="4663440" y="3319272"/>
+            <a:ext cx="914400" cy="749808"/>
+          </a:xfrm>
+          <a:prstGeom prst="straightConnector1">
+            <a:avLst/>
+          </a:prstGeom>
+          <a:ln w="15875" cap="flat">
+            <a:solidFill>
+              <a:srgbClr val="0B6E69"/>
+            </a:solidFill>
+            <a:tailEnd type="triangle"/>
+          </a:ln>
+        </p:spPr>
+      </p:cxnSp>
+      <p:cxnSp>
+        <p:nvCxnSpPr>
+          <p:cNvPr id="54" name="Connector 54"/>
+          <p:cNvCxnSpPr/>
+          <p:nvPr/>
+        </p:nvCxnSpPr>
+        <p:spPr>
+          <a:xfrm flipH="0" flipV="0">
+            <a:off x="7406640" y="2194560"/>
+            <a:ext cx="914400" cy="795528"/>
+          </a:xfrm>
+          <a:prstGeom prst="straightConnector1">
+            <a:avLst/>
+          </a:prstGeom>
+          <a:ln w="15875" cap="flat">
+            <a:solidFill>
+              <a:srgbClr val="0B6E69"/>
+            </a:solidFill>
+            <a:headEnd type="triangle"/>
+            <a:tailEnd type="triangle"/>
+          </a:ln>
+        </p:spPr>
+      </p:cxnSp>
+      <p:cxnSp>
+        <p:nvCxnSpPr>
+          <p:cNvPr id="55" name="Connector 55"/>
+          <p:cNvCxnSpPr/>
+          <p:nvPr/>
+        </p:nvCxnSpPr>
+        <p:spPr>
+          <a:xfrm flipH="0" flipV="1">
+            <a:off x="7406640" y="3319272"/>
+            <a:ext cx="914400" cy="749808"/>
+          </a:xfrm>
+          <a:prstGeom prst="straightConnector1">
+            <a:avLst/>
+          </a:prstGeom>
+          <a:ln w="15875" cap="flat">
+            <a:solidFill>
+              <a:srgbClr val="0B6E69"/>
+            </a:solidFill>
+            <a:headEnd type="triangle"/>
+            <a:tailEnd type="triangle"/>
+          </a:ln>
+        </p:spPr>
+      </p:cxnSp>
+      <p:sp>
+        <p:nvSpPr>
+          <p:cNvPr id="26" name="Shape 26"/>
+          <p:cNvSpPr txBox="1"/>
+          <p:nvPr/>
+        </p:nvSpPr>
+        <p:spPr>
+          <a:xfrm>
+            <a:off x="640080" y="4937760"/>
+            <a:ext cx="10972800" cy="457200"/>
+          </a:xfrm>
+          <a:prstGeom prst="roundRect">
+            <a:avLst/>
+          </a:prstGeom>
+          <a:noFill/>
+          <a:ln>
+            <a:noFill/>
+          </a:ln>
+        </p:spPr>
+        <p:txBody>
+          <a:bodyPr wrap="square" lIns="177800" tIns="177800" rIns="177800" bIns="177800"/>
+          <a:lstStyle/>
+          <a:p>
+            <a:pPr algn="ctr"/>
+            <a:r>
+              <a:rPr lang="ru-RU" sz="1300" b="0">
+                <a:solidFill>
+                  <a:srgbClr val="5E6A75"/>
+                </a:solidFill>
+                <a:latin typeface="Aptos"/>
+                <a:cs typeface="Aptos"/>
+              </a:rPr>
+              <a:t>Событие публикуется в Redis · доставляется обоим узлам · группы SignalR остаются локальным runtime-состоянием</a:t>
+            </a:r>
+          </a:p>
+        </p:txBody>
+      </p:sp>
+      <p:sp>
+        <p:nvSpPr>
+          <p:cNvPr id="27" name="Shape 27"/>
+          <p:cNvSpPr txBox="1"/>
+          <p:nvPr/>
+        </p:nvSpPr>
+        <p:spPr>
+          <a:xfrm>
+            <a:off x="640080" y="5440680"/>
+            <a:ext cx="10972800" cy="365760"/>
+          </a:xfrm>
+          <a:prstGeom prst="roundRect">
+            <a:avLst/>
+          </a:prstGeom>
+          <a:noFill/>
+          <a:ln>
+            <a:noFill/>
+          </a:ln>
+        </p:spPr>
+        <p:txBody>
+          <a:bodyPr wrap="square" lIns="177800" tIns="177800" rIns="177800" bIns="177800"/>
+          <a:lstStyle/>
+          <a:p>
+            <a:pPr algn="ctr"/>
+            <a:r>
+              <a:rPr lang="ru-RU" sz="1100" b="0">
+                <a:solidFill>
+                  <a:srgbClr val="5E6A75"/>
+                </a:solidFill>
+                <a:latin typeface="Aptos"/>
+                <a:cs typeface="Aptos"/>
+              </a:rPr>
+              <a:t>Оба экземпляра подключены к общей PostgreSQL; на схеме показан только канал real-time-доставки.</a:t>
             </a:r>
           </a:p>
         </p:txBody>
@@ -1325,7 +1818,44 @@
                 <a:latin typeface="Aptos"/>
                 <a:cs typeface="Aptos"/>
               </a:rPr>
-              <a:t>Стенд и программа испытаний</a:t>
+              <a:t>Что сделано</a:t>
+            </a:r>
+          </a:p>
+        </p:txBody>
+      </p:sp>
+      <p:sp>
+        <p:nvSpPr>
+          <p:cNvPr id="11" name="Shape 11"/>
+          <p:cNvSpPr txBox="1"/>
+          <p:nvPr/>
+        </p:nvSpPr>
+        <p:spPr>
+          <a:xfrm>
+            <a:off x="621792" y="987552"/>
+            <a:ext cx="9875520" cy="320040"/>
+          </a:xfrm>
+          <a:prstGeom prst="roundRect">
+            <a:avLst/>
+          </a:prstGeom>
+          <a:noFill/>
+          <a:ln>
+            <a:noFill/>
+          </a:ln>
+        </p:spPr>
+        <p:txBody>
+          <a:bodyPr wrap="square" lIns="177800" tIns="177800" rIns="177800" bIns="177800"/>
+          <a:lstStyle/>
+          <a:p>
+            <a:pPr algn="l"/>
+            <a:r>
+              <a:rPr lang="ru-RU" sz="1300" b="0">
+                <a:solidFill>
+                  <a:srgbClr val="5E6A75"/>
+                </a:solidFill>
+                <a:latin typeface="Aptos"/>
+                <a:cs typeface="Aptos"/>
+              </a:rPr>
+              <a:t>Backend-конфигурация, диагностика, стенд и проверочный клиент</a:t>
             </a:r>
           </a:p>
         </p:txBody>
@@ -1338,14 +1868,14 @@
         </p:nvSpPr>
         <p:spPr>
           <a:xfrm>
-            <a:off x="685800" y="1600200"/>
-            <a:ext cx="5212080" cy="2286000"/>
+            <a:off x="685800" y="1554480"/>
+            <a:ext cx="5349240" cy="2194560"/>
           </a:xfrm>
           <a:prstGeom prst="roundRect">
             <a:avLst/>
           </a:prstGeom>
           <a:solidFill>
-            <a:srgbClr val="E8F3F1"/>
+            <a:srgbClr val="FFFFFF"/>
           </a:solidFill>
           <a:ln w="12700">
             <a:solidFill>
@@ -1359,53 +1889,40 @@
           <a:p>
             <a:pPr algn="l"/>
             <a:r>
-              <a:rPr lang="ru-RU" sz="1500" b="0">
-                <a:solidFill>
-                  <a:srgbClr val="18212B"/>
-                </a:solidFill>
-                <a:latin typeface="Aptos"/>
-                <a:cs typeface="Aptos"/>
-              </a:rPr>
-              <a:t>Два режима</a:t>
-            </a:r>
-          </a:p>
-          <a:p>
-            <a:pPr algn="l"/>
-            <a:r>
-              <a:rPr lang="ru-RU" sz="1500" b="0">
-                <a:solidFill>
-                  <a:srgbClr val="18212B"/>
-                </a:solidFill>
-                <a:latin typeface="Aptos"/>
-                <a:cs typeface="Aptos"/>
-              </a:rPr>
-              <a:t>• С Redis backplane</a:t>
-            </a:r>
-          </a:p>
-          <a:p>
-            <a:pPr algn="l"/>
-            <a:r>
-              <a:rPr lang="ru-RU" sz="1500" b="0">
-                <a:solidFill>
-                  <a:srgbClr val="18212B"/>
-                </a:solidFill>
-                <a:latin typeface="Aptos"/>
-                <a:cs typeface="Aptos"/>
-              </a:rPr>
-              <a:t>• Без Redis backplane</a:t>
-            </a:r>
-          </a:p>
-          <a:p>
-            <a:pPr algn="l"/>
-            <a:r>
-              <a:rPr lang="ru-RU" sz="1500" b="0">
-                <a:solidFill>
-                  <a:srgbClr val="18212B"/>
-                </a:solidFill>
-                <a:latin typeface="Aptos"/>
-                <a:cs typeface="Aptos"/>
-              </a:rPr>
-              <a:t>Один и тот же код, разница — переменная окружения.</a:t>
+              <a:rPr lang="ru-RU" sz="1400" b="0">
+                <a:solidFill>
+                  <a:srgbClr val="18212B"/>
+                </a:solidFill>
+                <a:latin typeface="Aptos"/>
+                <a:cs typeface="Aptos"/>
+              </a:rPr>
+              <a:t>1 · Redis backplane для SignalR</a:t>
+            </a:r>
+          </a:p>
+          <a:p>
+            <a:pPr algn="l"/>
+            <a:r>
+              <a:rPr lang="ru-RU" sz="1400" b="0">
+                <a:solidFill>
+                  <a:srgbClr val="18212B"/>
+                </a:solidFill>
+                <a:latin typeface="Aptos"/>
+                <a:cs typeface="Aptos"/>
+              </a:rPr>
+              <a:t/>
+            </a:r>
+          </a:p>
+          <a:p>
+            <a:pPr algn="l"/>
+            <a:r>
+              <a:rPr lang="ru-RU" sz="1400" b="0">
+                <a:solidFill>
+                  <a:srgbClr val="18212B"/>
+                </a:solidFill>
+                <a:latin typeface="Aptos"/>
+                <a:cs typeface="Aptos"/>
+              </a:rPr>
+              <a:t>AddStackExchangeRedis с prefix app-api-realtime; включается переменной REDIS_CONNECTION_STRING — один и тот же код в обоих режимах.</a:t>
             </a:r>
           </a:p>
         </p:txBody>
@@ -1418,8 +1935,8 @@
         </p:nvSpPr>
         <p:spPr>
           <a:xfrm>
-            <a:off x="6172200" y="1600200"/>
-            <a:ext cx="5212080" cy="2286000"/>
+            <a:off x="685800" y="3840480"/>
+            <a:ext cx="5349240" cy="1874520"/>
           </a:xfrm>
           <a:prstGeom prst="roundRect">
             <a:avLst/>
@@ -1439,66 +1956,174 @@
           <a:p>
             <a:pPr algn="l"/>
             <a:r>
-              <a:rPr lang="ru-RU" sz="1500" b="0">
-                <a:solidFill>
-                  <a:srgbClr val="18212B"/>
-                </a:solidFill>
-                <a:latin typeface="Aptos"/>
-                <a:cs typeface="Aptos"/>
-              </a:rPr>
-              <a:t>Четыре сценария</a:t>
-            </a:r>
-          </a:p>
-          <a:p>
-            <a:pPr algn="l"/>
-            <a:r>
-              <a:rPr lang="ru-RU" sz="1500" b="0">
-                <a:solidFill>
-                  <a:srgbClr val="18212B"/>
-                </a:solidFill>
-                <a:latin typeface="Aptos"/>
-                <a:cs typeface="Aptos"/>
-              </a:rPr>
-              <a:t>• Одиночная доставка</a:t>
-            </a:r>
-          </a:p>
-          <a:p>
-            <a:pPr algn="l"/>
-            <a:r>
-              <a:rPr lang="ru-RU" sz="1500" b="0">
-                <a:solidFill>
-                  <a:srgbClr val="18212B"/>
-                </a:solidFill>
-                <a:latin typeface="Aptos"/>
-                <a:cs typeface="Aptos"/>
-              </a:rPr>
-              <a:t>• Серия из 5 итераций</a:t>
-            </a:r>
-          </a:p>
-          <a:p>
-            <a:pPr algn="l"/>
-            <a:r>
-              <a:rPr lang="ru-RU" sz="1500" b="0">
-                <a:solidFill>
-                  <a:srgbClr val="18212B"/>
-                </a:solidFill>
-                <a:latin typeface="Aptos"/>
-                <a:cs typeface="Aptos"/>
-              </a:rPr>
-              <a:t>• Rejoin после разрыва</a:t>
-            </a:r>
-          </a:p>
-          <a:p>
-            <a:pPr algn="l"/>
-            <a:r>
-              <a:rPr lang="ru-RU" sz="1500" b="0">
-                <a:solidFill>
-                  <a:srgbClr val="18212B"/>
-                </a:solidFill>
-                <a:latin typeface="Aptos"/>
-                <a:cs typeface="Aptos"/>
-              </a:rPr>
-              <a:t>• Failover узла</a:t>
+              <a:rPr lang="ru-RU" sz="1400" b="0">
+                <a:solidFill>
+                  <a:srgbClr val="18212B"/>
+                </a:solidFill>
+                <a:latin typeface="Aptos"/>
+                <a:cs typeface="Aptos"/>
+              </a:rPr>
+              <a:t>2 · Диагностический контур</a:t>
+            </a:r>
+          </a:p>
+          <a:p>
+            <a:pPr algn="l"/>
+            <a:r>
+              <a:rPr lang="ru-RU" sz="1400" b="0">
+                <a:solidFill>
+                  <a:srgbClr val="18212B"/>
+                </a:solidFill>
+                <a:latin typeface="Aptos"/>
+                <a:cs typeface="Aptos"/>
+              </a:rPr>
+              <a:t/>
+            </a:r>
+          </a:p>
+          <a:p>
+            <a:pPr algn="l"/>
+            <a:r>
+              <a:rPr lang="ru-RU" sz="1400" b="0">
+                <a:solidFill>
+                  <a:srgbClr val="18212B"/>
+                </a:solidFill>
+                <a:latin typeface="Aptos"/>
+                <a:cs typeface="Aptos"/>
+              </a:rPr>
+              <a:t>SERVER_INSTANCE_ID, GetConnectionDiagnosticsAsync(), логирование подключения, вступления в группу и отправки события.</a:t>
+            </a:r>
+          </a:p>
+        </p:txBody>
+      </p:sp>
+      <p:sp>
+        <p:nvSpPr>
+          <p:cNvPr id="22" name="Shape 22"/>
+          <p:cNvSpPr txBox="1"/>
+          <p:nvPr/>
+        </p:nvSpPr>
+        <p:spPr>
+          <a:xfrm>
+            <a:off x="6172200" y="1554480"/>
+            <a:ext cx="5349240" cy="2194560"/>
+          </a:xfrm>
+          <a:prstGeom prst="roundRect">
+            <a:avLst/>
+          </a:prstGeom>
+          <a:solidFill>
+            <a:srgbClr val="FFFFFF"/>
+          </a:solidFill>
+          <a:ln w="12700">
+            <a:solidFill>
+              <a:srgbClr val="D7D2C7"/>
+            </a:solidFill>
+          </a:ln>
+        </p:spPr>
+        <p:txBody>
+          <a:bodyPr wrap="square" lIns="177800" tIns="177800" rIns="177800" bIns="177800"/>
+          <a:lstStyle/>
+          <a:p>
+            <a:pPr algn="l"/>
+            <a:r>
+              <a:rPr lang="ru-RU" sz="1400" b="0">
+                <a:solidFill>
+                  <a:srgbClr val="18212B"/>
+                </a:solidFill>
+                <a:latin typeface="Aptos"/>
+                <a:cs typeface="Aptos"/>
+              </a:rPr>
+              <a:t>3 · Multi-instance стенд</a:t>
+            </a:r>
+          </a:p>
+          <a:p>
+            <a:pPr algn="l"/>
+            <a:r>
+              <a:rPr lang="ru-RU" sz="1400" b="0">
+                <a:solidFill>
+                  <a:srgbClr val="18212B"/>
+                </a:solidFill>
+                <a:latin typeface="Aptos"/>
+                <a:cs typeface="Aptos"/>
+              </a:rPr>
+              <a:t/>
+            </a:r>
+          </a:p>
+          <a:p>
+            <a:pPr algn="l"/>
+            <a:r>
+              <a:rPr lang="ru-RU" sz="1400" b="0">
+                <a:solidFill>
+                  <a:srgbClr val="18212B"/>
+                </a:solidFill>
+                <a:latin typeface="Aptos"/>
+                <a:cs typeface="Aptos"/>
+              </a:rPr>
+              <a:t>docker-compose.thesis.yml: app-api-1, app-api-2, Redis, PostgreSQL, nginx; override .no-backplane.yml для воспроизведения исходной проблемы.</a:t>
+            </a:r>
+          </a:p>
+        </p:txBody>
+      </p:sp>
+      <p:sp>
+        <p:nvSpPr>
+          <p:cNvPr id="23" name="Shape 23"/>
+          <p:cNvSpPr txBox="1"/>
+          <p:nvPr/>
+        </p:nvSpPr>
+        <p:spPr>
+          <a:xfrm>
+            <a:off x="6172200" y="3840480"/>
+            <a:ext cx="5349240" cy="1874520"/>
+          </a:xfrm>
+          <a:prstGeom prst="roundRect">
+            <a:avLst/>
+          </a:prstGeom>
+          <a:solidFill>
+            <a:srgbClr val="FFFFFF"/>
+          </a:solidFill>
+          <a:ln w="12700">
+            <a:solidFill>
+              <a:srgbClr val="D7D2C7"/>
+            </a:solidFill>
+          </a:ln>
+        </p:spPr>
+        <p:txBody>
+          <a:bodyPr wrap="square" lIns="177800" tIns="177800" rIns="177800" bIns="177800"/>
+          <a:lstStyle/>
+          <a:p>
+            <a:pPr algn="l"/>
+            <a:r>
+              <a:rPr lang="ru-RU" sz="1400" b="0">
+                <a:solidFill>
+                  <a:srgbClr val="18212B"/>
+                </a:solidFill>
+                <a:latin typeface="Aptos"/>
+                <a:cs typeface="Aptos"/>
+              </a:rPr>
+              <a:t>4 · Проверочный клиент на Node.js</a:t>
+            </a:r>
+          </a:p>
+          <a:p>
+            <a:pPr algn="l"/>
+            <a:r>
+              <a:rPr lang="ru-RU" sz="1400" b="0">
+                <a:solidFill>
+                  <a:srgbClr val="18212B"/>
+                </a:solidFill>
+                <a:latin typeface="Aptos"/>
+                <a:cs typeface="Aptos"/>
+              </a:rPr>
+              <a:t/>
+            </a:r>
+          </a:p>
+          <a:p>
+            <a:pPr algn="l"/>
+            <a:r>
+              <a:rPr lang="ru-RU" sz="1400" b="0">
+                <a:solidFill>
+                  <a:srgbClr val="18212B"/>
+                </a:solidFill>
+                <a:latin typeface="Aptos"/>
+                <a:cs typeface="Aptos"/>
+              </a:rPr>
+              <a:t>realtime-scaleout-check.mjs: одиночная доставка, серия, rejoin, failover.</a:t>
             </a:r>
           </a:p>
         </p:txBody>
@@ -1605,7 +2230,44 @@
                 <a:latin typeface="Aptos"/>
                 <a:cs typeface="Aptos"/>
               </a:rPr>
-              <a:t>Главный результат</a:t>
+              <a:t>Программа испытаний</a:t>
+            </a:r>
+          </a:p>
+        </p:txBody>
+      </p:sp>
+      <p:sp>
+        <p:nvSpPr>
+          <p:cNvPr id="11" name="Shape 11"/>
+          <p:cNvSpPr txBox="1"/>
+          <p:nvPr/>
+        </p:nvSpPr>
+        <p:spPr>
+          <a:xfrm>
+            <a:off x="621792" y="987552"/>
+            <a:ext cx="9875520" cy="320040"/>
+          </a:xfrm>
+          <a:prstGeom prst="roundRect">
+            <a:avLst/>
+          </a:prstGeom>
+          <a:noFill/>
+          <a:ln>
+            <a:noFill/>
+          </a:ln>
+        </p:spPr>
+        <p:txBody>
+          <a:bodyPr wrap="square" lIns="177800" tIns="177800" rIns="177800" bIns="177800"/>
+          <a:lstStyle/>
+          <a:p>
+            <a:pPr algn="l"/>
+            <a:r>
+              <a:rPr lang="ru-RU" sz="1300" b="0">
+                <a:solidFill>
+                  <a:srgbClr val="5E6A75"/>
+                </a:solidFill>
+                <a:latin typeface="Aptos"/>
+                <a:cs typeface="Aptos"/>
+              </a:rPr>
+              <a:t>Два режима по одному коду · четыре сценария проверки</a:t>
             </a:r>
           </a:p>
         </p:txBody>
@@ -1619,74 +2281,7 @@
         <p:spPr>
           <a:xfrm>
             <a:off x="685800" y="1554480"/>
-            <a:ext cx="5212080" cy="2377440"/>
-          </a:xfrm>
-          <a:prstGeom prst="roundRect">
-            <a:avLst/>
-          </a:prstGeom>
-          <a:solidFill>
-            <a:srgbClr val="FFF3D8"/>
-          </a:solidFill>
-          <a:ln w="12700">
-            <a:solidFill>
-              <a:srgbClr val="C76F2E"/>
-            </a:solidFill>
-          </a:ln>
-        </p:spPr>
-        <p:txBody>
-          <a:bodyPr wrap="square" lIns="177800" tIns="177800" rIns="177800" bIns="177800"/>
-          <a:lstStyle/>
-          <a:p>
-            <a:pPr algn="ctr"/>
-            <a:r>
-              <a:rPr lang="ru-RU" sz="2000" b="1">
-                <a:solidFill>
-                  <a:srgbClr val="18212B"/>
-                </a:solidFill>
-                <a:latin typeface="Aptos"/>
-                <a:cs typeface="Aptos"/>
-              </a:rPr>
-              <a:t>Без backplane</a:t>
-            </a:r>
-          </a:p>
-          <a:p>
-            <a:pPr algn="ctr"/>
-            <a:r>
-              <a:rPr lang="ru-RU" sz="2000" b="1">
-                <a:solidFill>
-                  <a:srgbClr val="18212B"/>
-                </a:solidFill>
-                <a:latin typeface="Aptos"/>
-                <a:cs typeface="Aptos"/>
-              </a:rPr>
-              <a:t>timeout 10000 мс</a:t>
-            </a:r>
-          </a:p>
-          <a:p>
-            <a:pPr algn="ctr"/>
-            <a:r>
-              <a:rPr lang="ru-RU" sz="2000" b="1">
-                <a:solidFill>
-                  <a:srgbClr val="18212B"/>
-                </a:solidFill>
-                <a:latin typeface="Aptos"/>
-                <a:cs typeface="Aptos"/>
-              </a:rPr>
-              <a:t>событие не доставлено</a:t>
-            </a:r>
-          </a:p>
-        </p:txBody>
-      </p:sp>
-      <p:sp>
-        <p:nvSpPr>
-          <p:cNvPr id="21" name="Shape 21"/>
-          <p:cNvSpPr txBox="1"/>
-          <p:nvPr/>
-        </p:nvSpPr>
-        <p:spPr>
-          <a:xfrm>
-            <a:off x="6172200" y="1554480"/>
-            <a:ext cx="5212080" cy="2377440"/>
+            <a:ext cx="5349240" cy="4160520"/>
           </a:xfrm>
           <a:prstGeom prst="roundRect">
             <a:avLst/>
@@ -1704,79 +2299,239 @@
           <a:bodyPr wrap="square" lIns="177800" tIns="177800" rIns="177800" bIns="177800"/>
           <a:lstStyle/>
           <a:p>
-            <a:pPr algn="ctr"/>
-            <a:r>
-              <a:rPr lang="ru-RU" sz="2000" b="1">
-                <a:solidFill>
-                  <a:srgbClr val="18212B"/>
-                </a:solidFill>
-                <a:latin typeface="Aptos"/>
-                <a:cs typeface="Aptos"/>
-              </a:rPr>
-              <a:t>С backplane</a:t>
-            </a:r>
-          </a:p>
-          <a:p>
-            <a:pPr algn="ctr"/>
-            <a:r>
-              <a:rPr lang="ru-RU" sz="2000" b="1">
-                <a:solidFill>
-                  <a:srgbClr val="18212B"/>
-                </a:solidFill>
-                <a:latin typeface="Aptos"/>
-                <a:cs typeface="Aptos"/>
-              </a:rPr>
-              <a:t>ok: true · 5 из 5</a:t>
-            </a:r>
-          </a:p>
-          <a:p>
-            <a:pPr algn="ctr"/>
-            <a:r>
-              <a:rPr lang="ru-RU" sz="2000" b="1">
-                <a:solidFill>
-                  <a:srgbClr val="18212B"/>
-                </a:solidFill>
-                <a:latin typeface="Aptos"/>
-                <a:cs typeface="Aptos"/>
-              </a:rPr>
-              <a:t>p95 = 11,6 мс</a:t>
-            </a:r>
-          </a:p>
-        </p:txBody>
-      </p:sp>
-      <p:sp>
-        <p:nvSpPr>
-          <p:cNvPr id="22" name="Shape 22"/>
-          <p:cNvSpPr txBox="1"/>
-          <p:nvPr/>
-        </p:nvSpPr>
-        <p:spPr>
-          <a:xfrm>
-            <a:off x="685800" y="4297680"/>
-            <a:ext cx="10698480" cy="502920"/>
-          </a:xfrm>
-          <a:prstGeom prst="roundRect">
-            <a:avLst/>
-          </a:prstGeom>
-          <a:noFill/>
-          <a:ln>
-            <a:noFill/>
-          </a:ln>
-        </p:spPr>
-        <p:txBody>
-          <a:bodyPr wrap="square" lIns="177800" tIns="177800" rIns="177800" bIns="177800"/>
-          <a:lstStyle/>
-          <a:p>
-            <a:pPr algn="ctr"/>
-            <a:r>
-              <a:rPr lang="ru-RU" sz="1400" b="0">
-                <a:solidFill>
-                  <a:srgbClr val="5E6A75"/>
-                </a:solidFill>
-                <a:latin typeface="Aptos"/>
-                <a:cs typeface="Aptos"/>
-              </a:rPr>
-              <a:t>Один код, один сценарий — разница только в наличии межузлового канала.</a:t>
+            <a:pPr algn="l"/>
+            <a:r>
+              <a:rPr lang="ru-RU" sz="1500" b="1">
+                <a:solidFill>
+                  <a:srgbClr val="18212B"/>
+                </a:solidFill>
+                <a:latin typeface="Aptos"/>
+                <a:cs typeface="Aptos"/>
+              </a:rPr>
+              <a:t>Два режима</a:t>
+            </a:r>
+          </a:p>
+          <a:p>
+            <a:pPr algn="l"/>
+            <a:r>
+              <a:rPr lang="ru-RU" sz="1500" b="1">
+                <a:solidFill>
+                  <a:srgbClr val="18212B"/>
+                </a:solidFill>
+                <a:latin typeface="Aptos"/>
+                <a:cs typeface="Aptos"/>
+              </a:rPr>
+              <a:t/>
+            </a:r>
+          </a:p>
+          <a:p>
+            <a:pPr algn="l"/>
+            <a:r>
+              <a:rPr lang="ru-RU" sz="1500" b="1">
+                <a:solidFill>
+                  <a:srgbClr val="18212B"/>
+                </a:solidFill>
+                <a:latin typeface="Aptos"/>
+                <a:cs typeface="Aptos"/>
+              </a:rPr>
+              <a:t>• Multi-instance без Redis backplane — воспроизведение проблемы</a:t>
+            </a:r>
+          </a:p>
+          <a:p>
+            <a:pPr algn="l"/>
+            <a:r>
+              <a:rPr lang="ru-RU" sz="1500" b="1">
+                <a:solidFill>
+                  <a:srgbClr val="18212B"/>
+                </a:solidFill>
+                <a:latin typeface="Aptos"/>
+                <a:cs typeface="Aptos"/>
+              </a:rPr>
+              <a:t/>
+            </a:r>
+          </a:p>
+          <a:p>
+            <a:pPr algn="l"/>
+            <a:r>
+              <a:rPr lang="ru-RU" sz="1500" b="1">
+                <a:solidFill>
+                  <a:srgbClr val="18212B"/>
+                </a:solidFill>
+                <a:latin typeface="Aptos"/>
+                <a:cs typeface="Aptos"/>
+              </a:rPr>
+              <a:t>• Multi-instance с Redis backplane — проверка решения</a:t>
+            </a:r>
+          </a:p>
+          <a:p>
+            <a:pPr algn="l"/>
+            <a:r>
+              <a:rPr lang="ru-RU" sz="1500" b="1">
+                <a:solidFill>
+                  <a:srgbClr val="18212B"/>
+                </a:solidFill>
+                <a:latin typeface="Aptos"/>
+                <a:cs typeface="Aptos"/>
+              </a:rPr>
+              <a:t/>
+            </a:r>
+          </a:p>
+          <a:p>
+            <a:pPr algn="l"/>
+            <a:r>
+              <a:rPr lang="ru-RU" sz="1500" b="1">
+                <a:solidFill>
+                  <a:srgbClr val="18212B"/>
+                </a:solidFill>
+                <a:latin typeface="Aptos"/>
+                <a:cs typeface="Aptos"/>
+              </a:rPr>
+              <a:t>Один и тот же код, один и тот же сценарий; отличие — значение REDIS_CONNECTION_STRING.</a:t>
+            </a:r>
+          </a:p>
+        </p:txBody>
+      </p:sp>
+      <p:sp>
+        <p:nvSpPr>
+          <p:cNvPr id="21" name="Shape 21"/>
+          <p:cNvSpPr txBox="1"/>
+          <p:nvPr/>
+        </p:nvSpPr>
+        <p:spPr>
+          <a:xfrm>
+            <a:off x="6172200" y="1554480"/>
+            <a:ext cx="5349240" cy="4160520"/>
+          </a:xfrm>
+          <a:prstGeom prst="roundRect">
+            <a:avLst/>
+          </a:prstGeom>
+          <a:solidFill>
+            <a:srgbClr val="FFFFFF"/>
+          </a:solidFill>
+          <a:ln w="12700">
+            <a:solidFill>
+              <a:srgbClr val="D7D2C7"/>
+            </a:solidFill>
+          </a:ln>
+        </p:spPr>
+        <p:txBody>
+          <a:bodyPr wrap="square" lIns="177800" tIns="177800" rIns="177800" bIns="177800"/>
+          <a:lstStyle/>
+          <a:p>
+            <a:pPr algn="l"/>
+            <a:r>
+              <a:rPr lang="ru-RU" sz="1500" b="0">
+                <a:solidFill>
+                  <a:srgbClr val="18212B"/>
+                </a:solidFill>
+                <a:latin typeface="Aptos"/>
+                <a:cs typeface="Aptos"/>
+              </a:rPr>
+              <a:t>Четыре сценария</a:t>
+            </a:r>
+          </a:p>
+          <a:p>
+            <a:pPr algn="l"/>
+            <a:r>
+              <a:rPr lang="ru-RU" sz="1500" b="0">
+                <a:solidFill>
+                  <a:srgbClr val="18212B"/>
+                </a:solidFill>
+                <a:latin typeface="Aptos"/>
+                <a:cs typeface="Aptos"/>
+              </a:rPr>
+              <a:t/>
+            </a:r>
+          </a:p>
+          <a:p>
+            <a:pPr algn="l"/>
+            <a:r>
+              <a:rPr lang="ru-RU" sz="1500" b="0">
+                <a:solidFill>
+                  <a:srgbClr val="18212B"/>
+                </a:solidFill>
+                <a:latin typeface="Aptos"/>
+                <a:cs typeface="Aptos"/>
+              </a:rPr>
+              <a:t>• Одиночная cross-node доставка</a:t>
+            </a:r>
+          </a:p>
+          <a:p>
+            <a:pPr algn="l"/>
+            <a:r>
+              <a:rPr lang="ru-RU" sz="1500" b="0">
+                <a:solidFill>
+                  <a:srgbClr val="18212B"/>
+                </a:solidFill>
+                <a:latin typeface="Aptos"/>
+                <a:cs typeface="Aptos"/>
+              </a:rPr>
+              <a:t/>
+            </a:r>
+          </a:p>
+          <a:p>
+            <a:pPr algn="l"/>
+            <a:r>
+              <a:rPr lang="ru-RU" sz="1500" b="0">
+                <a:solidFill>
+                  <a:srgbClr val="18212B"/>
+                </a:solidFill>
+                <a:latin typeface="Aptos"/>
+                <a:cs typeface="Aptos"/>
+              </a:rPr>
+              <a:t>• Серия из 5 итераций (THESIS_ITERATIONS)</a:t>
+            </a:r>
+          </a:p>
+          <a:p>
+            <a:pPr algn="l"/>
+            <a:r>
+              <a:rPr lang="ru-RU" sz="1500" b="0">
+                <a:solidFill>
+                  <a:srgbClr val="18212B"/>
+                </a:solidFill>
+                <a:latin typeface="Aptos"/>
+                <a:cs typeface="Aptos"/>
+              </a:rPr>
+              <a:t/>
+            </a:r>
+          </a:p>
+          <a:p>
+            <a:pPr algn="l"/>
+            <a:r>
+              <a:rPr lang="ru-RU" sz="1500" b="0">
+                <a:solidFill>
+                  <a:srgbClr val="18212B"/>
+                </a:solidFill>
+                <a:latin typeface="Aptos"/>
+                <a:cs typeface="Aptos"/>
+              </a:rPr>
+              <a:t>• Rejoin после разрыва соединения</a:t>
+            </a:r>
+          </a:p>
+          <a:p>
+            <a:pPr algn="l"/>
+            <a:r>
+              <a:rPr lang="ru-RU" sz="1500" b="0">
+                <a:solidFill>
+                  <a:srgbClr val="18212B"/>
+                </a:solidFill>
+                <a:latin typeface="Aptos"/>
+                <a:cs typeface="Aptos"/>
+              </a:rPr>
+              <a:t/>
+            </a:r>
+          </a:p>
+          <a:p>
+            <a:pPr algn="l"/>
+            <a:r>
+              <a:rPr lang="ru-RU" sz="1500" b="0">
+                <a:solidFill>
+                  <a:srgbClr val="18212B"/>
+                </a:solidFill>
+                <a:latin typeface="Aptos"/>
+                <a:cs typeface="Aptos"/>
+              </a:rPr>
+              <a:t>• Failover после остановки узла</a:t>
             </a:r>
           </a:p>
         </p:txBody>
@@ -1883,7 +2638,44 @@
                 <a:latin typeface="Aptos"/>
                 <a:cs typeface="Aptos"/>
               </a:rPr>
-              <a:t>Устойчивость: rejoin и failover</a:t>
+              <a:t>Главный результат</a:t>
+            </a:r>
+          </a:p>
+        </p:txBody>
+      </p:sp>
+      <p:sp>
+        <p:nvSpPr>
+          <p:cNvPr id="11" name="Shape 11"/>
+          <p:cNvSpPr txBox="1"/>
+          <p:nvPr/>
+        </p:nvSpPr>
+        <p:spPr>
+          <a:xfrm>
+            <a:off x="621792" y="987552"/>
+            <a:ext cx="9875520" cy="320040"/>
+          </a:xfrm>
+          <a:prstGeom prst="roundRect">
+            <a:avLst/>
+          </a:prstGeom>
+          <a:noFill/>
+          <a:ln>
+            <a:noFill/>
+          </a:ln>
+        </p:spPr>
+        <p:txBody>
+          <a:bodyPr wrap="square" lIns="177800" tIns="177800" rIns="177800" bIns="177800"/>
+          <a:lstStyle/>
+          <a:p>
+            <a:pPr algn="l"/>
+            <a:r>
+              <a:rPr lang="ru-RU" sz="1300" b="0">
+                <a:solidFill>
+                  <a:srgbClr val="5E6A75"/>
+                </a:solidFill>
+                <a:latin typeface="Aptos"/>
+                <a:cs typeface="Aptos"/>
+              </a:rPr>
+              <a:t>Один код и один сценарий — разница только в наличии Redis-канала</a:t>
             </a:r>
           </a:p>
         </p:txBody>
@@ -1896,18 +2688,18 @@
         </p:nvSpPr>
         <p:spPr>
           <a:xfrm>
-            <a:off x="685800" y="1600200"/>
-            <a:ext cx="5212080" cy="2286000"/>
+            <a:off x="685800" y="1554480"/>
+            <a:ext cx="5349240" cy="3291840"/>
           </a:xfrm>
           <a:prstGeom prst="roundRect">
             <a:avLst/>
           </a:prstGeom>
           <a:solidFill>
-            <a:srgbClr val="FFFFFF"/>
+            <a:srgbClr val="FFF3D8"/>
           </a:solidFill>
           <a:ln w="12700">
             <a:solidFill>
-              <a:srgbClr val="D7D2C7"/>
+              <a:srgbClr val="C76F2E"/>
             </a:solidFill>
           </a:ln>
         </p:spPr>
@@ -1915,42 +2707,81 @@
           <a:bodyPr wrap="square" lIns="177800" tIns="177800" rIns="177800" bIns="177800"/>
           <a:lstStyle/>
           <a:p>
-            <a:pPr algn="l"/>
-            <a:r>
-              <a:rPr lang="ru-RU" sz="1500" b="0">
-                <a:solidFill>
-                  <a:srgbClr val="18212B"/>
-                </a:solidFill>
-                <a:latin typeface="Aptos"/>
-                <a:cs typeface="Aptos"/>
-              </a:rPr>
-              <a:t>Rejoin после разрыва</a:t>
-            </a:r>
-          </a:p>
-          <a:p>
-            <a:pPr algn="l"/>
-            <a:r>
-              <a:rPr lang="ru-RU" sz="1500" b="0">
-                <a:solidFill>
-                  <a:srgbClr val="18212B"/>
-                </a:solidFill>
-                <a:latin typeface="Aptos"/>
-                <a:cs typeface="Aptos"/>
-              </a:rPr>
-              <a:t>Новый connectionId, повторный JoinReportGroupAsync.</a:t>
-            </a:r>
-          </a:p>
-          <a:p>
-            <a:pPr algn="l"/>
-            <a:r>
-              <a:rPr lang="ru-RU" sz="1500" b="0">
-                <a:solidFill>
-                  <a:srgbClr val="18212B"/>
-                </a:solidFill>
-                <a:latin typeface="Aptos"/>
-                <a:cs typeface="Aptos"/>
-              </a:rPr>
-              <a:t>Событие после rejoin — 6,6 мс.</a:t>
+            <a:pPr algn="ctr"/>
+            <a:r>
+              <a:rPr lang="ru-RU" sz="1800" b="1">
+                <a:solidFill>
+                  <a:srgbClr val="18212B"/>
+                </a:solidFill>
+                <a:latin typeface="Aptos"/>
+                <a:cs typeface="Aptos"/>
+              </a:rPr>
+              <a:t>Без backplane</a:t>
+            </a:r>
+          </a:p>
+          <a:p>
+            <a:pPr algn="ctr"/>
+            <a:r>
+              <a:rPr lang="ru-RU" sz="1800" b="1">
+                <a:solidFill>
+                  <a:srgbClr val="18212B"/>
+                </a:solidFill>
+                <a:latin typeface="Aptos"/>
+                <a:cs typeface="Aptos"/>
+              </a:rPr>
+              <a:t/>
+            </a:r>
+          </a:p>
+          <a:p>
+            <a:pPr algn="ctr"/>
+            <a:r>
+              <a:rPr lang="ru-RU" sz="1800" b="1">
+                <a:solidFill>
+                  <a:srgbClr val="18212B"/>
+                </a:solidFill>
+                <a:latin typeface="Aptos"/>
+                <a:cs typeface="Aptos"/>
+              </a:rPr>
+              <a:t>ReceiveReportPatch</a:t>
+            </a:r>
+          </a:p>
+          <a:p>
+            <a:pPr algn="ctr"/>
+            <a:r>
+              <a:rPr lang="ru-RU" sz="1800" b="1">
+                <a:solidFill>
+                  <a:srgbClr val="18212B"/>
+                </a:solidFill>
+                <a:latin typeface="Aptos"/>
+                <a:cs typeface="Aptos"/>
+              </a:rPr>
+              <a:t>timed out · 10 000 мс</a:t>
+            </a:r>
+          </a:p>
+          <a:p>
+            <a:pPr algn="ctr"/>
+            <a:r>
+              <a:rPr lang="ru-RU" sz="1800" b="1">
+                <a:solidFill>
+                  <a:srgbClr val="18212B"/>
+                </a:solidFill>
+                <a:latin typeface="Aptos"/>
+                <a:cs typeface="Aptos"/>
+              </a:rPr>
+              <a:t/>
+            </a:r>
+          </a:p>
+          <a:p>
+            <a:pPr algn="ctr"/>
+            <a:r>
+              <a:rPr lang="ru-RU" sz="1800" b="1">
+                <a:solidFill>
+                  <a:srgbClr val="18212B"/>
+                </a:solidFill>
+                <a:latin typeface="Aptos"/>
+                <a:cs typeface="Aptos"/>
+              </a:rPr>
+              <a:t>Событие, созданное на app-api-1, не дошло до клиента на app-api-2</a:t>
             </a:r>
           </a:p>
         </p:txBody>
@@ -1963,8 +2794,8 @@
         </p:nvSpPr>
         <p:spPr>
           <a:xfrm>
-            <a:off x="6172200" y="1600200"/>
-            <a:ext cx="5212080" cy="2286000"/>
+            <a:off x="6172200" y="1554480"/>
+            <a:ext cx="5349240" cy="3291840"/>
           </a:xfrm>
           <a:prstGeom prst="roundRect">
             <a:avLst/>
@@ -1982,42 +2813,118 @@
           <a:bodyPr wrap="square" lIns="177800" tIns="177800" rIns="177800" bIns="177800"/>
           <a:lstStyle/>
           <a:p>
-            <a:pPr algn="l"/>
-            <a:r>
-              <a:rPr lang="ru-RU" sz="1500" b="0">
-                <a:solidFill>
-                  <a:srgbClr val="18212B"/>
-                </a:solidFill>
-                <a:latin typeface="Aptos"/>
-                <a:cs typeface="Aptos"/>
-              </a:rPr>
-              <a:t>Failover узла</a:t>
-            </a:r>
-          </a:p>
-          <a:p>
-            <a:pPr algn="l"/>
-            <a:r>
-              <a:rPr lang="ru-RU" sz="1500" b="0">
-                <a:solidFill>
-                  <a:srgbClr val="18212B"/>
-                </a:solidFill>
-                <a:latin typeface="Aptos"/>
-                <a:cs typeface="Aptos"/>
-              </a:rPr>
-              <a:t>Клиент переподключился через nginx с app-api-2 на app-api-1.</a:t>
-            </a:r>
-          </a:p>
-          <a:p>
-            <a:pPr algn="l"/>
-            <a:r>
-              <a:rPr lang="ru-RU" sz="1500" b="0">
-                <a:solidFill>
-                  <a:srgbClr val="18212B"/>
-                </a:solidFill>
-                <a:latin typeface="Aptos"/>
-                <a:cs typeface="Aptos"/>
-              </a:rPr>
-              <a:t>reconnect + rejoin — 240,3 мс.</a:t>
+            <a:pPr algn="ctr"/>
+            <a:r>
+              <a:rPr lang="ru-RU" sz="1800" b="1">
+                <a:solidFill>
+                  <a:srgbClr val="18212B"/>
+                </a:solidFill>
+                <a:latin typeface="Aptos"/>
+                <a:cs typeface="Aptos"/>
+              </a:rPr>
+              <a:t>С backplane</a:t>
+            </a:r>
+          </a:p>
+          <a:p>
+            <a:pPr algn="ctr"/>
+            <a:r>
+              <a:rPr lang="ru-RU" sz="1800" b="1">
+                <a:solidFill>
+                  <a:srgbClr val="18212B"/>
+                </a:solidFill>
+                <a:latin typeface="Aptos"/>
+                <a:cs typeface="Aptos"/>
+              </a:rPr>
+              <a:t/>
+            </a:r>
+          </a:p>
+          <a:p>
+            <a:pPr algn="ctr"/>
+            <a:r>
+              <a:rPr lang="ru-RU" sz="1800" b="1">
+                <a:solidFill>
+                  <a:srgbClr val="18212B"/>
+                </a:solidFill>
+                <a:latin typeface="Aptos"/>
+                <a:cs typeface="Aptos"/>
+              </a:rPr>
+              <a:t>ok: true · ReceiveReportPatch получен</a:t>
+            </a:r>
+          </a:p>
+          <a:p>
+            <a:pPr algn="ctr"/>
+            <a:r>
+              <a:rPr lang="ru-RU" sz="1800" b="1">
+                <a:solidFill>
+                  <a:srgbClr val="18212B"/>
+                </a:solidFill>
+                <a:latin typeface="Aptos"/>
+                <a:cs typeface="Aptos"/>
+              </a:rPr>
+              <a:t>deliveryLatencyMs ≈ 9,5 мс</a:t>
+            </a:r>
+          </a:p>
+          <a:p>
+            <a:pPr algn="ctr"/>
+            <a:r>
+              <a:rPr lang="ru-RU" sz="1800" b="1">
+                <a:solidFill>
+                  <a:srgbClr val="18212B"/>
+                </a:solidFill>
+                <a:latin typeface="Aptos"/>
+                <a:cs typeface="Aptos"/>
+              </a:rPr>
+              <a:t/>
+            </a:r>
+          </a:p>
+          <a:p>
+            <a:pPr algn="ctr"/>
+            <a:r>
+              <a:rPr lang="ru-RU" sz="1800" b="1">
+                <a:solidFill>
+                  <a:srgbClr val="18212B"/>
+                </a:solidFill>
+                <a:latin typeface="Aptos"/>
+                <a:cs typeface="Aptos"/>
+              </a:rPr>
+              <a:t>Клиент на app-api-2 получил событие с app-api-1</a:t>
+            </a:r>
+          </a:p>
+        </p:txBody>
+      </p:sp>
+      <p:sp>
+        <p:nvSpPr>
+          <p:cNvPr id="22" name="Shape 22"/>
+          <p:cNvSpPr txBox="1"/>
+          <p:nvPr/>
+        </p:nvSpPr>
+        <p:spPr>
+          <a:xfrm>
+            <a:off x="685800" y="5074920"/>
+            <a:ext cx="10835640" cy="777240"/>
+          </a:xfrm>
+          <a:prstGeom prst="roundRect">
+            <a:avLst/>
+          </a:prstGeom>
+          <a:noFill/>
+          <a:ln>
+            <a:noFill/>
+          </a:ln>
+        </p:spPr>
+        <p:txBody>
+          <a:bodyPr wrap="square" lIns="177800" tIns="177800" rIns="177800" bIns="177800"/>
+          <a:lstStyle/>
+          <a:p>
+            <a:pPr algn="ctr"/>
+            <a:r>
+              <a:rPr lang="ru-RU" sz="1300" b="0">
+                <a:solidFill>
+                  <a:srgbClr val="5E6A75"/>
+                </a:solidFill>
+                <a:latin typeface="Aptos"/>
+                <a:cs typeface="Aptos"/>
+              </a:rPr>
+              <a:t>Сопоставление двух режимов на одном стенде показывает причинную связь между включением межузлового канала SignalR и успешной доставкой события.</a:t>
             </a:r>
           </a:p>
         </p:txBody>
@@ -2124,7 +3031,44 @@
                 <a:latin typeface="Aptos"/>
                 <a:cs typeface="Aptos"/>
               </a:rPr>
-              <a:t>Вывод</a:t>
+              <a:t>Дополнительные проверки</a:t>
+            </a:r>
+          </a:p>
+        </p:txBody>
+      </p:sp>
+      <p:sp>
+        <p:nvSpPr>
+          <p:cNvPr id="11" name="Shape 11"/>
+          <p:cNvSpPr txBox="1"/>
+          <p:nvPr/>
+        </p:nvSpPr>
+        <p:spPr>
+          <a:xfrm>
+            <a:off x="621792" y="987552"/>
+            <a:ext cx="9875520" cy="320040"/>
+          </a:xfrm>
+          <a:prstGeom prst="roundRect">
+            <a:avLst/>
+          </a:prstGeom>
+          <a:noFill/>
+          <a:ln>
+            <a:noFill/>
+          </a:ln>
+        </p:spPr>
+        <p:txBody>
+          <a:bodyPr wrap="square" lIns="177800" tIns="177800" rIns="177800" bIns="177800"/>
+          <a:lstStyle/>
+          <a:p>
+            <a:pPr algn="l"/>
+            <a:r>
+              <a:rPr lang="ru-RU" sz="1300" b="0">
+                <a:solidFill>
+                  <a:srgbClr val="5E6A75"/>
+                </a:solidFill>
+                <a:latin typeface="Aptos"/>
+                <a:cs typeface="Aptos"/>
+              </a:rPr>
+              <a:t>Повторяемость, повторное вступление в группу и восстановление после отказа узла</a:t>
             </a:r>
           </a:p>
         </p:txBody>
@@ -2137,8 +3081,8 @@
         </p:nvSpPr>
         <p:spPr>
           <a:xfrm>
-            <a:off x="685800" y="1691640"/>
-            <a:ext cx="10698480" cy="1280160"/>
+            <a:off x="685800" y="1600200"/>
+            <a:ext cx="3657600" cy="4114800"/>
           </a:xfrm>
           <a:prstGeom prst="roundRect">
             <a:avLst/>
@@ -2156,16 +3100,133 @@
           <a:bodyPr wrap="square" lIns="177800" tIns="177800" rIns="177800" bIns="177800"/>
           <a:lstStyle/>
           <a:p>
-            <a:pPr algn="ctr"/>
-            <a:r>
-              <a:rPr lang="ru-RU" sz="2000" b="1">
-                <a:solidFill>
-                  <a:srgbClr val="18212B"/>
-                </a:solidFill>
-                <a:latin typeface="Aptos"/>
-                <a:cs typeface="Aptos"/>
-              </a:rPr>
-              <a:t>Ограничение single-node WebSocket-архитектуры устранено за счёт распределённого real-time контура.</a:t>
+            <a:pPr algn="l"/>
+            <a:r>
+              <a:rPr lang="ru-RU" sz="1500" b="0">
+                <a:solidFill>
+                  <a:srgbClr val="18212B"/>
+                </a:solidFill>
+                <a:latin typeface="Aptos"/>
+                <a:cs typeface="Aptos"/>
+              </a:rPr>
+              <a:t>Серия 5 итераций</a:t>
+            </a:r>
+          </a:p>
+          <a:p>
+            <a:pPr algn="l"/>
+            <a:r>
+              <a:rPr lang="ru-RU" sz="1500" b="0">
+                <a:solidFill>
+                  <a:srgbClr val="18212B"/>
+                </a:solidFill>
+                <a:latin typeface="Aptos"/>
+                <a:cs typeface="Aptos"/>
+              </a:rPr>
+              <a:t/>
+            </a:r>
+          </a:p>
+          <a:p>
+            <a:pPr algn="l"/>
+            <a:r>
+              <a:rPr lang="ru-RU" sz="1500" b="0">
+                <a:solidFill>
+                  <a:srgbClr val="18212B"/>
+                </a:solidFill>
+                <a:latin typeface="Aptos"/>
+                <a:cs typeface="Aptos"/>
+              </a:rPr>
+              <a:t>successful 5 / 5</a:t>
+            </a:r>
+          </a:p>
+          <a:p>
+            <a:pPr algn="l"/>
+            <a:r>
+              <a:rPr lang="ru-RU" sz="1500" b="0">
+                <a:solidFill>
+                  <a:srgbClr val="18212B"/>
+                </a:solidFill>
+                <a:latin typeface="Aptos"/>
+                <a:cs typeface="Aptos"/>
+              </a:rPr>
+              <a:t/>
+            </a:r>
+          </a:p>
+          <a:p>
+            <a:pPr algn="l"/>
+            <a:r>
+              <a:rPr lang="ru-RU" sz="1500" b="0">
+                <a:solidFill>
+                  <a:srgbClr val="18212B"/>
+                </a:solidFill>
+                <a:latin typeface="Aptos"/>
+                <a:cs typeface="Aptos"/>
+              </a:rPr>
+              <a:t>min 5,5 мс</a:t>
+            </a:r>
+          </a:p>
+          <a:p>
+            <a:pPr algn="l"/>
+            <a:r>
+              <a:rPr lang="ru-RU" sz="1500" b="0">
+                <a:solidFill>
+                  <a:srgbClr val="18212B"/>
+                </a:solidFill>
+                <a:latin typeface="Aptos"/>
+                <a:cs typeface="Aptos"/>
+              </a:rPr>
+              <a:t>avg 8,4 мс</a:t>
+            </a:r>
+          </a:p>
+          <a:p>
+            <a:pPr algn="l"/>
+            <a:r>
+              <a:rPr lang="ru-RU" sz="1500" b="0">
+                <a:solidFill>
+                  <a:srgbClr val="18212B"/>
+                </a:solidFill>
+                <a:latin typeface="Aptos"/>
+                <a:cs typeface="Aptos"/>
+              </a:rPr>
+              <a:t>p50 9,1 мс</a:t>
+            </a:r>
+          </a:p>
+          <a:p>
+            <a:pPr algn="l"/>
+            <a:r>
+              <a:rPr lang="ru-RU" sz="1500" b="0">
+                <a:solidFill>
+                  <a:srgbClr val="18212B"/>
+                </a:solidFill>
+                <a:latin typeface="Aptos"/>
+                <a:cs typeface="Aptos"/>
+              </a:rPr>
+              <a:t>p95 11,6 мс</a:t>
+            </a:r>
+          </a:p>
+          <a:p>
+            <a:pPr algn="l"/>
+            <a:r>
+              <a:rPr lang="ru-RU" sz="1500" b="0">
+                <a:solidFill>
+                  <a:srgbClr val="18212B"/>
+                </a:solidFill>
+                <a:latin typeface="Aptos"/>
+                <a:cs typeface="Aptos"/>
+              </a:rPr>
+              <a:t/>
+            </a:r>
+          </a:p>
+          <a:p>
+            <a:pPr algn="l"/>
+            <a:r>
+              <a:rPr lang="ru-RU" sz="1500" b="0">
+                <a:solidFill>
+                  <a:srgbClr val="18212B"/>
+                </a:solidFill>
+                <a:latin typeface="Aptos"/>
+                <a:cs typeface="Aptos"/>
+              </a:rPr>
+              <a:t>Подтверждена повторяемость доставки.</a:t>
             </a:r>
           </a:p>
         </p:txBody>
@@ -2178,8 +3239,8 @@
         </p:nvSpPr>
         <p:spPr>
           <a:xfrm>
-            <a:off x="685800" y="3246120"/>
-            <a:ext cx="3383280" cy="1554480"/>
+            <a:off x="4434840" y="1600200"/>
+            <a:ext cx="3657600" cy="4114800"/>
           </a:xfrm>
           <a:prstGeom prst="roundRect">
             <a:avLst/>
@@ -2199,27 +3260,118 @@
           <a:p>
             <a:pPr algn="l"/>
             <a:r>
-              <a:rPr lang="ru-RU" sz="1400" b="1">
-                <a:solidFill>
-                  <a:srgbClr val="18212B"/>
-                </a:solidFill>
-                <a:latin typeface="Aptos"/>
-                <a:cs typeface="Aptos"/>
-              </a:rPr>
-              <a:t>Проблема</a:t>
-            </a:r>
-          </a:p>
-          <a:p>
-            <a:pPr algn="l"/>
-            <a:r>
-              <a:rPr lang="ru-RU" sz="1400" b="1">
-                <a:solidFill>
-                  <a:srgbClr val="18212B"/>
-                </a:solidFill>
-                <a:latin typeface="Aptos"/>
-                <a:cs typeface="Aptos"/>
-              </a:rPr>
-              <a:t>Без backplane событие теряется между узлами.</a:t>
+              <a:rPr lang="ru-RU" sz="1500" b="0">
+                <a:solidFill>
+                  <a:srgbClr val="18212B"/>
+                </a:solidFill>
+                <a:latin typeface="Aptos"/>
+                <a:cs typeface="Aptos"/>
+              </a:rPr>
+              <a:t>Rejoin после разрыва</a:t>
+            </a:r>
+          </a:p>
+          <a:p>
+            <a:pPr algn="l"/>
+            <a:r>
+              <a:rPr lang="ru-RU" sz="1500" b="0">
+                <a:solidFill>
+                  <a:srgbClr val="18212B"/>
+                </a:solidFill>
+                <a:latin typeface="Aptos"/>
+                <a:cs typeface="Aptos"/>
+              </a:rPr>
+              <a:t/>
+            </a:r>
+          </a:p>
+          <a:p>
+            <a:pPr algn="l"/>
+            <a:r>
+              <a:rPr lang="ru-RU" sz="1500" b="0">
+                <a:solidFill>
+                  <a:srgbClr val="18212B"/>
+                </a:solidFill>
+                <a:latin typeface="Aptos"/>
+                <a:cs typeface="Aptos"/>
+              </a:rPr>
+              <a:t>Новый connectionId</a:t>
+            </a:r>
+          </a:p>
+          <a:p>
+            <a:pPr algn="l"/>
+            <a:r>
+              <a:rPr lang="ru-RU" sz="1500" b="0">
+                <a:solidFill>
+                  <a:srgbClr val="18212B"/>
+                </a:solidFill>
+                <a:latin typeface="Aptos"/>
+                <a:cs typeface="Aptos"/>
+              </a:rPr>
+              <a:t>повторный JoinReportGroupAsync</a:t>
+            </a:r>
+          </a:p>
+          <a:p>
+            <a:pPr algn="l"/>
+            <a:r>
+              <a:rPr lang="ru-RU" sz="1500" b="0">
+                <a:solidFill>
+                  <a:srgbClr val="18212B"/>
+                </a:solidFill>
+                <a:latin typeface="Aptos"/>
+                <a:cs typeface="Aptos"/>
+              </a:rPr>
+              <a:t/>
+            </a:r>
+          </a:p>
+          <a:p>
+            <a:pPr algn="l"/>
+            <a:r>
+              <a:rPr lang="ru-RU" sz="1500" b="0">
+                <a:solidFill>
+                  <a:srgbClr val="18212B"/>
+                </a:solidFill>
+                <a:latin typeface="Aptos"/>
+                <a:cs typeface="Aptos"/>
+              </a:rPr>
+              <a:t>rejoin 12,9 мс</a:t>
+            </a:r>
+          </a:p>
+          <a:p>
+            <a:pPr algn="l"/>
+            <a:r>
+              <a:rPr lang="ru-RU" sz="1500" b="0">
+                <a:solidFill>
+                  <a:srgbClr val="18212B"/>
+                </a:solidFill>
+                <a:latin typeface="Aptos"/>
+                <a:cs typeface="Aptos"/>
+              </a:rPr>
+              <a:t>delivery 6,6 мс</a:t>
+            </a:r>
+          </a:p>
+          <a:p>
+            <a:pPr algn="l"/>
+            <a:r>
+              <a:rPr lang="ru-RU" sz="1500" b="0">
+                <a:solidFill>
+                  <a:srgbClr val="18212B"/>
+                </a:solidFill>
+                <a:latin typeface="Aptos"/>
+                <a:cs typeface="Aptos"/>
+              </a:rPr>
+              <a:t/>
+            </a:r>
+          </a:p>
+          <a:p>
+            <a:pPr algn="l"/>
+            <a:r>
+              <a:rPr lang="ru-RU" sz="1500" b="0">
+                <a:solidFill>
+                  <a:srgbClr val="18212B"/>
+                </a:solidFill>
+                <a:latin typeface="Aptos"/>
+                <a:cs typeface="Aptos"/>
+              </a:rPr>
+              <a:t>Подтверждена повторная подписка.</a:t>
             </a:r>
           </a:p>
         </p:txBody>
@@ -2232,8 +3384,8 @@
         </p:nvSpPr>
         <p:spPr>
           <a:xfrm>
-            <a:off x="4251960" y="3246120"/>
-            <a:ext cx="3383280" cy="1554480"/>
+            <a:off x="8183880" y="1600200"/>
+            <a:ext cx="3657600" cy="4114800"/>
           </a:xfrm>
           <a:prstGeom prst="roundRect">
             <a:avLst/>
@@ -2253,41 +3405,280 @@
           <a:p>
             <a:pPr algn="l"/>
             <a:r>
-              <a:rPr lang="ru-RU" sz="1400" b="1">
-                <a:solidFill>
-                  <a:srgbClr val="18212B"/>
-                </a:solidFill>
-                <a:latin typeface="Aptos"/>
-                <a:cs typeface="Aptos"/>
-              </a:rPr>
-              <a:t>Решение</a:t>
-            </a:r>
-          </a:p>
-          <a:p>
-            <a:pPr algn="l"/>
-            <a:r>
-              <a:rPr lang="ru-RU" sz="1400" b="1">
-                <a:solidFill>
-                  <a:srgbClr val="18212B"/>
-                </a:solidFill>
-                <a:latin typeface="Aptos"/>
-                <a:cs typeface="Aptos"/>
-              </a:rPr>
-              <a:t>SignalR + Redis backplane + nginx + два app-api.</a:t>
-            </a:r>
-          </a:p>
-        </p:txBody>
-      </p:sp>
-      <p:sp>
-        <p:nvSpPr>
-          <p:cNvPr id="23" name="Shape 23"/>
-          <p:cNvSpPr txBox="1"/>
-          <p:nvPr/>
-        </p:nvSpPr>
-        <p:spPr>
-          <a:xfrm>
-            <a:off x="7818120" y="3246120"/>
-            <a:ext cx="3383280" cy="1554480"/>
+              <a:rPr lang="ru-RU" sz="1500" b="0">
+                <a:solidFill>
+                  <a:srgbClr val="18212B"/>
+                </a:solidFill>
+                <a:latin typeface="Aptos"/>
+                <a:cs typeface="Aptos"/>
+              </a:rPr>
+              <a:t>Failover узла</a:t>
+            </a:r>
+          </a:p>
+          <a:p>
+            <a:pPr algn="l"/>
+            <a:r>
+              <a:rPr lang="ru-RU" sz="1500" b="0">
+                <a:solidFill>
+                  <a:srgbClr val="18212B"/>
+                </a:solidFill>
+                <a:latin typeface="Aptos"/>
+                <a:cs typeface="Aptos"/>
+              </a:rPr>
+              <a:t/>
+            </a:r>
+          </a:p>
+          <a:p>
+            <a:pPr algn="l"/>
+            <a:r>
+              <a:rPr lang="ru-RU" sz="1500" b="0">
+                <a:solidFill>
+                  <a:srgbClr val="18212B"/>
+                </a:solidFill>
+                <a:latin typeface="Aptos"/>
+                <a:cs typeface="Aptos"/>
+              </a:rPr>
+              <a:t>Контейнер app-api-2 остановлен</a:t>
+            </a:r>
+          </a:p>
+          <a:p>
+            <a:pPr algn="l"/>
+            <a:r>
+              <a:rPr lang="ru-RU" sz="1500" b="0">
+                <a:solidFill>
+                  <a:srgbClr val="18212B"/>
+                </a:solidFill>
+                <a:latin typeface="Aptos"/>
+                <a:cs typeface="Aptos"/>
+              </a:rPr>
+              <a:t>клиент переподключился через nginx к app-api-1</a:t>
+            </a:r>
+          </a:p>
+          <a:p>
+            <a:pPr algn="l"/>
+            <a:r>
+              <a:rPr lang="ru-RU" sz="1500" b="0">
+                <a:solidFill>
+                  <a:srgbClr val="18212B"/>
+                </a:solidFill>
+                <a:latin typeface="Aptos"/>
+                <a:cs typeface="Aptos"/>
+              </a:rPr>
+              <a:t/>
+            </a:r>
+          </a:p>
+          <a:p>
+            <a:pPr algn="l"/>
+            <a:r>
+              <a:rPr lang="ru-RU" sz="1500" b="0">
+                <a:solidFill>
+                  <a:srgbClr val="18212B"/>
+                </a:solidFill>
+                <a:latin typeface="Aptos"/>
+                <a:cs typeface="Aptos"/>
+              </a:rPr>
+              <a:t>reconnect 240,3 мс</a:t>
+            </a:r>
+          </a:p>
+          <a:p>
+            <a:pPr algn="l"/>
+            <a:r>
+              <a:rPr lang="ru-RU" sz="1500" b="0">
+                <a:solidFill>
+                  <a:srgbClr val="18212B"/>
+                </a:solidFill>
+                <a:latin typeface="Aptos"/>
+                <a:cs typeface="Aptos"/>
+              </a:rPr>
+              <a:t>delivery 7,3 мс</a:t>
+            </a:r>
+          </a:p>
+          <a:p>
+            <a:pPr algn="l"/>
+            <a:r>
+              <a:rPr lang="ru-RU" sz="1500" b="0">
+                <a:solidFill>
+                  <a:srgbClr val="18212B"/>
+                </a:solidFill>
+                <a:latin typeface="Aptos"/>
+                <a:cs typeface="Aptos"/>
+              </a:rPr>
+              <a:t/>
+            </a:r>
+          </a:p>
+          <a:p>
+            <a:pPr algn="l"/>
+            <a:r>
+              <a:rPr lang="ru-RU" sz="1500" b="0">
+                <a:solidFill>
+                  <a:srgbClr val="18212B"/>
+                </a:solidFill>
+                <a:latin typeface="Aptos"/>
+                <a:cs typeface="Aptos"/>
+              </a:rPr>
+              <a:t>Подтверждено восстановление после отказа узла.</a:t>
+            </a:r>
+          </a:p>
+        </p:txBody>
+      </p:sp>
+      <p:sp>
+        <p:nvSpPr>
+          <p:cNvPr id="900" name="Shape 900"/>
+          <p:cNvSpPr txBox="1"/>
+          <p:nvPr/>
+        </p:nvSpPr>
+        <p:spPr>
+          <a:xfrm>
+            <a:off x="594360" y="6510528"/>
+            <a:ext cx="10972800" cy="201168"/>
+          </a:xfrm>
+          <a:prstGeom prst="roundRect">
+            <a:avLst/>
+          </a:prstGeom>
+          <a:noFill/>
+          <a:ln>
+            <a:noFill/>
+          </a:ln>
+        </p:spPr>
+        <p:txBody>
+          <a:bodyPr wrap="square" lIns="177800" tIns="177800" rIns="177800" bIns="177800"/>
+          <a:lstStyle/>
+          <a:p>
+            <a:pPr algn="l"/>
+            <a:r>
+              <a:rPr lang="ru-RU" sz="800" b="0">
+                <a:solidFill>
+                  <a:srgbClr val="5E6A75"/>
+                </a:solidFill>
+                <a:latin typeface="Aptos"/>
+                <a:cs typeface="Aptos"/>
+              </a:rPr>
+              <a:t>Real-time scale-out · 08</a:t>
+            </a:r>
+          </a:p>
+        </p:txBody>
+      </p:sp>
+    </p:spTree>
+  </p:cSld>
+  <p:clrMapOvr>
+    <a:masterClrMapping/>
+  </p:clrMapOvr>
+</p:sld>
+</file>
+
+<file path=ppt/slides/slide9.xml><?xml version="1.0" encoding="utf-8"?>
+<p:sld xmlns:a="http://schemas.openxmlformats.org/drawingml/2006/main" xmlns:r="http://schemas.openxmlformats.org/officeDocument/2006/relationships" xmlns:p="http://schemas.openxmlformats.org/presentationml/2006/main">
+  <p:cSld>
+    <p:bg>
+      <p:bgPr>
+        <a:solidFill>
+          <a:srgbClr val="F6F3EC"/>
+        </a:solidFill>
+        <a:effectLst/>
+      </p:bgPr>
+    </p:bg>
+    <p:spTree>
+      <p:nvGrpSpPr>
+        <p:cNvPr id="1" name=""/>
+        <p:cNvGrpSpPr/>
+        <p:nvPr/>
+      </p:nvGrpSpPr>
+      <p:grpSpPr>
+        <a:xfrm>
+          <a:off x="0" y="0"/>
+          <a:ext cx="0" cy="0"/>
+          <a:chOff x="0" y="0"/>
+          <a:chExt cx="0" cy="0"/>
+        </a:xfrm>
+      </p:grpSpPr>
+      <p:sp>
+        <p:nvSpPr>
+          <p:cNvPr id="10" name="Shape 10"/>
+          <p:cNvSpPr txBox="1"/>
+          <p:nvPr/>
+        </p:nvSpPr>
+        <p:spPr>
+          <a:xfrm>
+            <a:off x="594360" y="411480"/>
+            <a:ext cx="10881360" cy="658368"/>
+          </a:xfrm>
+          <a:prstGeom prst="roundRect">
+            <a:avLst/>
+          </a:prstGeom>
+          <a:noFill/>
+          <a:ln>
+            <a:noFill/>
+          </a:ln>
+        </p:spPr>
+        <p:txBody>
+          <a:bodyPr wrap="square" lIns="177800" tIns="177800" rIns="177800" bIns="177800"/>
+          <a:lstStyle/>
+          <a:p>
+            <a:pPr algn="l"/>
+            <a:r>
+              <a:rPr lang="ru-RU" sz="3000" b="1">
+                <a:solidFill>
+                  <a:srgbClr val="18212B"/>
+                </a:solidFill>
+                <a:latin typeface="Aptos"/>
+                <a:cs typeface="Aptos"/>
+              </a:rPr>
+              <a:t>Вывод</a:t>
+            </a:r>
+          </a:p>
+        </p:txBody>
+      </p:sp>
+      <p:sp>
+        <p:nvSpPr>
+          <p:cNvPr id="20" name="Shape 20"/>
+          <p:cNvSpPr txBox="1"/>
+          <p:nvPr/>
+        </p:nvSpPr>
+        <p:spPr>
+          <a:xfrm>
+            <a:off x="685800" y="1554480"/>
+            <a:ext cx="10835640" cy="1371600"/>
+          </a:xfrm>
+          <a:prstGeom prst="roundRect">
+            <a:avLst/>
+          </a:prstGeom>
+          <a:solidFill>
+            <a:srgbClr val="E8F3F1"/>
+          </a:solidFill>
+          <a:ln w="12700">
+            <a:solidFill>
+              <a:srgbClr val="0B6E69"/>
+            </a:solidFill>
+          </a:ln>
+        </p:spPr>
+        <p:txBody>
+          <a:bodyPr wrap="square" lIns="177800" tIns="177800" rIns="177800" bIns="177800"/>
+          <a:lstStyle/>
+          <a:p>
+            <a:pPr algn="ctr"/>
+            <a:r>
+              <a:rPr lang="ru-RU" sz="1800" b="1">
+                <a:solidFill>
+                  <a:srgbClr val="18212B"/>
+                </a:solidFill>
+                <a:latin typeface="Aptos"/>
+                <a:cs typeface="Aptos"/>
+              </a:rPr>
+              <a:t>Ограничение single-node WebSocket-архитектуры устранено за счёт распределённого real-time контура; тезис практики подтверждён экспериментально.</a:t>
+            </a:r>
+          </a:p>
+        </p:txBody>
+      </p:sp>
+      <p:sp>
+        <p:nvSpPr>
+          <p:cNvPr id="21" name="Shape 21"/>
+          <p:cNvSpPr txBox="1"/>
+          <p:nvPr/>
+        </p:nvSpPr>
+        <p:spPr>
+          <a:xfrm>
+            <a:off x="685800" y="3108960"/>
+            <a:ext cx="3520440" cy="2606040"/>
           </a:xfrm>
           <a:prstGeom prst="roundRect">
             <a:avLst/>
@@ -2314,6 +3705,140 @@
                 <a:latin typeface="Aptos"/>
                 <a:cs typeface="Aptos"/>
               </a:rPr>
+              <a:t>Проблема</a:t>
+            </a:r>
+          </a:p>
+          <a:p>
+            <a:pPr algn="l"/>
+            <a:r>
+              <a:rPr lang="ru-RU" sz="1400" b="1">
+                <a:solidFill>
+                  <a:srgbClr val="18212B"/>
+                </a:solidFill>
+                <a:latin typeface="Aptos"/>
+                <a:cs typeface="Aptos"/>
+              </a:rPr>
+              <a:t/>
+            </a:r>
+          </a:p>
+          <a:p>
+            <a:pPr algn="l"/>
+            <a:r>
+              <a:rPr lang="ru-RU" sz="1400" b="1">
+                <a:solidFill>
+                  <a:srgbClr val="18212B"/>
+                </a:solidFill>
+                <a:latin typeface="Aptos"/>
+                <a:cs typeface="Aptos"/>
+              </a:rPr>
+              <a:t>Single-node SignalR: события не пересекают границу узла.</a:t>
+            </a:r>
+          </a:p>
+        </p:txBody>
+      </p:sp>
+      <p:sp>
+        <p:nvSpPr>
+          <p:cNvPr id="22" name="Shape 22"/>
+          <p:cNvSpPr txBox="1"/>
+          <p:nvPr/>
+        </p:nvSpPr>
+        <p:spPr>
+          <a:xfrm>
+            <a:off x="4343400" y="3108960"/>
+            <a:ext cx="3520440" cy="2606040"/>
+          </a:xfrm>
+          <a:prstGeom prst="roundRect">
+            <a:avLst/>
+          </a:prstGeom>
+          <a:solidFill>
+            <a:srgbClr val="FFFFFF"/>
+          </a:solidFill>
+          <a:ln w="12700">
+            <a:solidFill>
+              <a:srgbClr val="D7D2C7"/>
+            </a:solidFill>
+          </a:ln>
+        </p:spPr>
+        <p:txBody>
+          <a:bodyPr wrap="square" lIns="177800" tIns="177800" rIns="177800" bIns="177800"/>
+          <a:lstStyle/>
+          <a:p>
+            <a:pPr algn="l"/>
+            <a:r>
+              <a:rPr lang="ru-RU" sz="1400" b="1">
+                <a:solidFill>
+                  <a:srgbClr val="18212B"/>
+                </a:solidFill>
+                <a:latin typeface="Aptos"/>
+                <a:cs typeface="Aptos"/>
+              </a:rPr>
+              <a:t>Решение</a:t>
+            </a:r>
+          </a:p>
+          <a:p>
+            <a:pPr algn="l"/>
+            <a:r>
+              <a:rPr lang="ru-RU" sz="1400" b="1">
+                <a:solidFill>
+                  <a:srgbClr val="18212B"/>
+                </a:solidFill>
+                <a:latin typeface="Aptos"/>
+                <a:cs typeface="Aptos"/>
+              </a:rPr>
+              <a:t/>
+            </a:r>
+          </a:p>
+          <a:p>
+            <a:pPr algn="l"/>
+            <a:r>
+              <a:rPr lang="ru-RU" sz="1400" b="1">
+                <a:solidFill>
+                  <a:srgbClr val="18212B"/>
+                </a:solidFill>
+                <a:latin typeface="Aptos"/>
+                <a:cs typeface="Aptos"/>
+              </a:rPr>
+              <a:t>SignalR + Redis backplane + nginx + два app-api; общий код, конфигурация через переменную окружения.</a:t>
+            </a:r>
+          </a:p>
+        </p:txBody>
+      </p:sp>
+      <p:sp>
+        <p:nvSpPr>
+          <p:cNvPr id="23" name="Shape 23"/>
+          <p:cNvSpPr txBox="1"/>
+          <p:nvPr/>
+        </p:nvSpPr>
+        <p:spPr>
+          <a:xfrm>
+            <a:off x="8001000" y="3108960"/>
+            <a:ext cx="3520440" cy="2606040"/>
+          </a:xfrm>
+          <a:prstGeom prst="roundRect">
+            <a:avLst/>
+          </a:prstGeom>
+          <a:solidFill>
+            <a:srgbClr val="FFFFFF"/>
+          </a:solidFill>
+          <a:ln w="12700">
+            <a:solidFill>
+              <a:srgbClr val="D7D2C7"/>
+            </a:solidFill>
+          </a:ln>
+        </p:spPr>
+        <p:txBody>
+          <a:bodyPr wrap="square" lIns="177800" tIns="177800" rIns="177800" bIns="177800"/>
+          <a:lstStyle/>
+          <a:p>
+            <a:pPr algn="l"/>
+            <a:r>
+              <a:rPr lang="ru-RU" sz="1400" b="1">
+                <a:solidFill>
+                  <a:srgbClr val="18212B"/>
+                </a:solidFill>
+                <a:latin typeface="Aptos"/>
+                <a:cs typeface="Aptos"/>
+              </a:rPr>
               <a:t>Доказательство</a:t>
             </a:r>
           </a:p>
@@ -2327,7 +3852,20 @@
                 <a:latin typeface="Aptos"/>
                 <a:cs typeface="Aptos"/>
               </a:rPr>
-              <a:t>Delivery, серия, rejoin, failover.</a:t>
+              <a:t/>
+            </a:r>
+          </a:p>
+          <a:p>
+            <a:pPr algn="l"/>
+            <a:r>
+              <a:rPr lang="ru-RU" sz="1400" b="1">
+                <a:solidFill>
+                  <a:srgbClr val="18212B"/>
+                </a:solidFill>
+                <a:latin typeface="Aptos"/>
+                <a:cs typeface="Aptos"/>
+              </a:rPr>
+              <a:t>Delivery (без / с) · серия 5 / 5 · rejoin · failover — воспроизводимый Docker Compose стенд.</a:t>
             </a:r>
           </a:p>
         </p:txBody>
@@ -2364,7 +3902,7 @@
                 <a:latin typeface="Aptos"/>
                 <a:cs typeface="Aptos"/>
               </a:rPr>
-              <a:t>Real-time scale-out · 08</a:t>
+              <a:t>Real-time scale-out · 09</a:t>
             </a:r>
           </a:p>
         </p:txBody>

--- a/build/pptx/practice-defense-draft.pptx
+++ b/build/pptx/practice-defense-draft.pptx
@@ -806,7 +806,7 @@
                 <a:latin typeface="Aptos"/>
                 <a:cs typeface="Aptos"/>
               </a:rPr>
-              <a:t>Нет масштабирования; один узел — точка отказа</a:t>
+              <a:t>Нет масштабирования; один узел — единственная точка отказа</a:t>
             </a:r>
           </a:p>
         </p:txBody>
@@ -847,7 +847,7 @@
                 <a:latin typeface="Aptos"/>
                 <a:cs typeface="Aptos"/>
               </a:rPr>
-              <a:t>Несколько экземпляров без backplane</a:t>
+              <a:t>Несколько экземпляров без общего канала</a:t>
             </a:r>
           </a:p>
           <a:p>
@@ -860,7 +860,7 @@
                 <a:latin typeface="Aptos"/>
                 <a:cs typeface="Aptos"/>
               </a:rPr>
-              <a:t>Real-time пространство фрагментируется по узлам</a:t>
+              <a:t>События не доходят до клиентов, подключённых к другим узлам</a:t>
             </a:r>
           </a:p>
         </p:txBody>
@@ -901,7 +901,7 @@
                 <a:latin typeface="Aptos"/>
                 <a:cs typeface="Aptos"/>
               </a:rPr>
-              <a:t>Sticky sessions</a:t>
+              <a:t>Привязка клиента к узлу (sticky)</a:t>
             </a:r>
           </a:p>
           <a:p>
@@ -914,7 +914,7 @@
                 <a:latin typeface="Aptos"/>
                 <a:cs typeface="Aptos"/>
               </a:rPr>
-              <a:t>Удерживают клиента на узле, но не доставляют события на другие</a:t>
+              <a:t>Клиент остаётся на одном узле, но события на другие не приходят</a:t>
             </a:r>
           </a:p>
         </p:txBody>
@@ -955,7 +955,7 @@
                 <a:latin typeface="Aptos"/>
                 <a:cs typeface="Aptos"/>
               </a:rPr>
-              <a:t>Broker / event bus</a:t>
+              <a:t>Внешняя шина событий</a:t>
             </a:r>
           </a:p>
           <a:p>
@@ -968,7 +968,7 @@
                 <a:latin typeface="Aptos"/>
                 <a:cs typeface="Aptos"/>
               </a:rPr>
-              <a:t>Даёт межузловую доставку, но требует схем событий и persistence</a:t>
+              <a:t>Доставка между узлами есть, но требуется отдельная схема событий</a:t>
             </a:r>
           </a:p>
         </p:txBody>
@@ -1009,7 +1009,7 @@
                 <a:latin typeface="Aptos"/>
                 <a:cs typeface="Aptos"/>
               </a:rPr>
-              <a:t>Managed real-time service</a:t>
+              <a:t>Облачный real-time сервис</a:t>
             </a:r>
           </a:p>
           <a:p>
@@ -1022,7 +1022,7 @@
                 <a:latin typeface="Aptos"/>
                 <a:cs typeface="Aptos"/>
               </a:rPr>
-              <a:t>Уменьшает контроль над self-hosted контуром</a:t>
+              <a:t>Готовое решение, но снижает контроль над собственным контуром</a:t>
             </a:r>
           </a:p>
         </p:txBody>
@@ -1076,7 +1076,7 @@
                 <a:latin typeface="Aptos"/>
                 <a:cs typeface="Aptos"/>
               </a:rPr>
-              <a:t>self-hosted, без перестройки логики, transient pub/sub</a:t>
+              <a:t>Штатный механизм, без перестройки кода, подходит для событий интерфейса</a:t>
             </a:r>
           </a:p>
         </p:txBody>
@@ -1113,7 +1113,7 @@
                 <a:latin typeface="Aptos"/>
                 <a:cs typeface="Aptos"/>
               </a:rPr>
-              <a:t>Критерии выбора: совместимость с self-hosted стендом, минимальная перестройка доменной логики, наличие штатной поддержки в ASP.NET Core SignalR, пригодность для transient UI-событий и воспроизводимость на локальном Docker Compose стенде.</a:t>
+              <a:t>Критерии выбора: запускается на локальном стенде, сохраняет существующий код доставки событий, штатно поддерживается в ASP.NET Core SignalR, подходит для коротких событий интерфейса и легко воспроизводится.</a:t>
             </a:r>
           </a:p>
         </p:txBody>
@@ -1855,7 +1855,7 @@
                 <a:latin typeface="Aptos"/>
                 <a:cs typeface="Aptos"/>
               </a:rPr>
-              <a:t>Backend-конфигурация, диагностика, стенд и проверочный клиент</a:t>
+              <a:t>Подключён межузловой канал, добавлена диагностика, собран стенд и клиент проверки</a:t>
             </a:r>
           </a:p>
         </p:txBody>
@@ -1870,73 +1870,6 @@
           <a:xfrm>
             <a:off x="685800" y="1554480"/>
             <a:ext cx="5349240" cy="2194560"/>
-          </a:xfrm>
-          <a:prstGeom prst="roundRect">
-            <a:avLst/>
-          </a:prstGeom>
-          <a:solidFill>
-            <a:srgbClr val="FFFFFF"/>
-          </a:solidFill>
-          <a:ln w="12700">
-            <a:solidFill>
-              <a:srgbClr val="0B6E69"/>
-            </a:solidFill>
-          </a:ln>
-        </p:spPr>
-        <p:txBody>
-          <a:bodyPr wrap="square" lIns="177800" tIns="177800" rIns="177800" bIns="177800"/>
-          <a:lstStyle/>
-          <a:p>
-            <a:pPr algn="l"/>
-            <a:r>
-              <a:rPr lang="ru-RU" sz="1400" b="0">
-                <a:solidFill>
-                  <a:srgbClr val="18212B"/>
-                </a:solidFill>
-                <a:latin typeface="Aptos"/>
-                <a:cs typeface="Aptos"/>
-              </a:rPr>
-              <a:t>1 · Redis backplane для SignalR</a:t>
-            </a:r>
-          </a:p>
-          <a:p>
-            <a:pPr algn="l"/>
-            <a:r>
-              <a:rPr lang="ru-RU" sz="1400" b="0">
-                <a:solidFill>
-                  <a:srgbClr val="18212B"/>
-                </a:solidFill>
-                <a:latin typeface="Aptos"/>
-                <a:cs typeface="Aptos"/>
-              </a:rPr>
-              <a:t/>
-            </a:r>
-          </a:p>
-          <a:p>
-            <a:pPr algn="l"/>
-            <a:r>
-              <a:rPr lang="ru-RU" sz="1400" b="0">
-                <a:solidFill>
-                  <a:srgbClr val="18212B"/>
-                </a:solidFill>
-                <a:latin typeface="Aptos"/>
-                <a:cs typeface="Aptos"/>
-              </a:rPr>
-              <a:t>AddStackExchangeRedis с prefix app-api-realtime; включается переменной REDIS_CONNECTION_STRING — один и тот же код в обоих режимах.</a:t>
-            </a:r>
-          </a:p>
-        </p:txBody>
-      </p:sp>
-      <p:sp>
-        <p:nvSpPr>
-          <p:cNvPr id="21" name="Shape 21"/>
-          <p:cNvSpPr txBox="1"/>
-          <p:nvPr/>
-        </p:nvSpPr>
-        <p:spPr>
-          <a:xfrm>
-            <a:off x="685800" y="3840480"/>
-            <a:ext cx="5349240" cy="1874520"/>
           </a:xfrm>
           <a:prstGeom prst="roundRect">
             <a:avLst/>
@@ -1963,7 +1896,7 @@
                 <a:latin typeface="Aptos"/>
                 <a:cs typeface="Aptos"/>
               </a:rPr>
-              <a:t>2 · Диагностический контур</a:t>
+              <a:t>1 · Межузловая доставка событий</a:t>
             </a:r>
           </a:p>
           <a:p>
@@ -1989,21 +1922,21 @@
                 <a:latin typeface="Aptos"/>
                 <a:cs typeface="Aptos"/>
               </a:rPr>
-              <a:t>SERVER_INSTANCE_ID, GetConnectionDiagnosticsAsync(), логирование подключения, вступления в группу и отправки события.</a:t>
-            </a:r>
-          </a:p>
-        </p:txBody>
-      </p:sp>
-      <p:sp>
-        <p:nvSpPr>
-          <p:cNvPr id="22" name="Shape 22"/>
-          <p:cNvSpPr txBox="1"/>
-          <p:nvPr/>
-        </p:nvSpPr>
-        <p:spPr>
-          <a:xfrm>
-            <a:off x="6172200" y="1554480"/>
-            <a:ext cx="5349240" cy="2194560"/>
+              <a:t>К SignalR подключён Redis backplane. Включается переменной окружения — один и тот же код работает и в режиме с межузловым каналом, и без него.</a:t>
+            </a:r>
+          </a:p>
+        </p:txBody>
+      </p:sp>
+      <p:sp>
+        <p:nvSpPr>
+          <p:cNvPr id="21" name="Shape 21"/>
+          <p:cNvSpPr txBox="1"/>
+          <p:nvPr/>
+        </p:nvSpPr>
+        <p:spPr>
+          <a:xfrm>
+            <a:off x="685800" y="3840480"/>
+            <a:ext cx="5349240" cy="1874520"/>
           </a:xfrm>
           <a:prstGeom prst="roundRect">
             <a:avLst/>
@@ -2030,7 +1963,7 @@
                 <a:latin typeface="Aptos"/>
                 <a:cs typeface="Aptos"/>
               </a:rPr>
-              <a:t>3 · Multi-instance стенд</a:t>
+              <a:t>2 · Диагностика подключения</a:t>
             </a:r>
           </a:p>
           <a:p>
@@ -2056,21 +1989,21 @@
                 <a:latin typeface="Aptos"/>
                 <a:cs typeface="Aptos"/>
               </a:rPr>
-              <a:t>docker-compose.thesis.yml: app-api-1, app-api-2, Redis, PostgreSQL, nginx; override .no-backplane.yml для воспроизведения исходной проблемы.</a:t>
-            </a:r>
-          </a:p>
-        </p:txBody>
-      </p:sp>
-      <p:sp>
-        <p:nvSpPr>
-          <p:cNvPr id="23" name="Shape 23"/>
-          <p:cNvSpPr txBox="1"/>
-          <p:nvPr/>
-        </p:nvSpPr>
-        <p:spPr>
-          <a:xfrm>
-            <a:off x="6172200" y="3840480"/>
-            <a:ext cx="5349240" cy="1874520"/>
+              <a:t>Узел сообщает свой идентификатор и идентификатор соединения; ключевые события жизненного цикла соединения логируются.</a:t>
+            </a:r>
+          </a:p>
+        </p:txBody>
+      </p:sp>
+      <p:sp>
+        <p:nvSpPr>
+          <p:cNvPr id="22" name="Shape 22"/>
+          <p:cNvSpPr txBox="1"/>
+          <p:nvPr/>
+        </p:nvSpPr>
+        <p:spPr>
+          <a:xfrm>
+            <a:off x="6172200" y="1554480"/>
+            <a:ext cx="5349240" cy="2194560"/>
           </a:xfrm>
           <a:prstGeom prst="roundRect">
             <a:avLst/>
@@ -2097,7 +2030,7 @@
                 <a:latin typeface="Aptos"/>
                 <a:cs typeface="Aptos"/>
               </a:rPr>
-              <a:t>4 · Проверочный клиент на Node.js</a:t>
+              <a:t>3 · Многоэкземплярный стенд</a:t>
             </a:r>
           </a:p>
           <a:p>
@@ -2123,7 +2056,74 @@
                 <a:latin typeface="Aptos"/>
                 <a:cs typeface="Aptos"/>
               </a:rPr>
-              <a:t>realtime-scaleout-check.mjs: одиночная доставка, серия, rejoin, failover.</a:t>
+              <a:t>Два экземпляра backend за nginx, общая база данных и Redis, отдельный режим без межузлового канала — для воспроизведения исходной проблемы.</a:t>
+            </a:r>
+          </a:p>
+        </p:txBody>
+      </p:sp>
+      <p:sp>
+        <p:nvSpPr>
+          <p:cNvPr id="23" name="Shape 23"/>
+          <p:cNvSpPr txBox="1"/>
+          <p:nvPr/>
+        </p:nvSpPr>
+        <p:spPr>
+          <a:xfrm>
+            <a:off x="6172200" y="3840480"/>
+            <a:ext cx="5349240" cy="1874520"/>
+          </a:xfrm>
+          <a:prstGeom prst="roundRect">
+            <a:avLst/>
+          </a:prstGeom>
+          <a:solidFill>
+            <a:srgbClr val="FFFFFF"/>
+          </a:solidFill>
+          <a:ln w="12700">
+            <a:solidFill>
+              <a:srgbClr val="D7D2C7"/>
+            </a:solidFill>
+          </a:ln>
+        </p:spPr>
+        <p:txBody>
+          <a:bodyPr wrap="square" lIns="177800" tIns="177800" rIns="177800" bIns="177800"/>
+          <a:lstStyle/>
+          <a:p>
+            <a:pPr algn="l"/>
+            <a:r>
+              <a:rPr lang="ru-RU" sz="1400" b="0">
+                <a:solidFill>
+                  <a:srgbClr val="18212B"/>
+                </a:solidFill>
+                <a:latin typeface="Aptos"/>
+                <a:cs typeface="Aptos"/>
+              </a:rPr>
+              <a:t>4 · Проверочный клиент</a:t>
+            </a:r>
+          </a:p>
+          <a:p>
+            <a:pPr algn="l"/>
+            <a:r>
+              <a:rPr lang="ru-RU" sz="1400" b="0">
+                <a:solidFill>
+                  <a:srgbClr val="18212B"/>
+                </a:solidFill>
+                <a:latin typeface="Aptos"/>
+                <a:cs typeface="Aptos"/>
+              </a:rPr>
+              <a:t/>
+            </a:r>
+          </a:p>
+          <a:p>
+            <a:pPr algn="l"/>
+            <a:r>
+              <a:rPr lang="ru-RU" sz="1400" b="0">
+                <a:solidFill>
+                  <a:srgbClr val="18212B"/>
+                </a:solidFill>
+                <a:latin typeface="Aptos"/>
+                <a:cs typeface="Aptos"/>
+              </a:rPr>
+              <a:t>Подключается к разным узлам, фиксирует доставку события и поддерживает четыре сценария проверки.</a:t>
             </a:r>
           </a:p>
         </p:txBody>
@@ -2287,11 +2287,11 @@
             <a:avLst/>
           </a:prstGeom>
           <a:solidFill>
-            <a:srgbClr val="E8F3F1"/>
+            <a:srgbClr val="FFFFFF"/>
           </a:solidFill>
           <a:ln w="12700">
             <a:solidFill>
-              <a:srgbClr val="0B6E69"/>
+              <a:srgbClr val="D7D2C7"/>
             </a:solidFill>
           </a:ln>
         </p:spPr>
@@ -2301,7 +2301,7 @@
           <a:p>
             <a:pPr algn="l"/>
             <a:r>
-              <a:rPr lang="ru-RU" sz="1500" b="1">
+              <a:rPr lang="ru-RU" sz="1500" b="0">
                 <a:solidFill>
                   <a:srgbClr val="18212B"/>
                 </a:solidFill>
@@ -2314,7 +2314,7 @@
           <a:p>
             <a:pPr algn="l"/>
             <a:r>
-              <a:rPr lang="ru-RU" sz="1500" b="1">
+              <a:rPr lang="ru-RU" sz="1500" b="0">
                 <a:solidFill>
                   <a:srgbClr val="18212B"/>
                 </a:solidFill>
@@ -2327,20 +2327,20 @@
           <a:p>
             <a:pPr algn="l"/>
             <a:r>
-              <a:rPr lang="ru-RU" sz="1500" b="1">
-                <a:solidFill>
-                  <a:srgbClr val="18212B"/>
-                </a:solidFill>
-                <a:latin typeface="Aptos"/>
-                <a:cs typeface="Aptos"/>
-              </a:rPr>
-              <a:t>• Multi-instance без Redis backplane — воспроизведение проблемы</a:t>
-            </a:r>
-          </a:p>
-          <a:p>
-            <a:pPr algn="l"/>
-            <a:r>
-              <a:rPr lang="ru-RU" sz="1500" b="1">
+              <a:rPr lang="ru-RU" sz="1500" b="0">
+                <a:solidFill>
+                  <a:srgbClr val="18212B"/>
+                </a:solidFill>
+                <a:latin typeface="Aptos"/>
+                <a:cs typeface="Aptos"/>
+              </a:rPr>
+              <a:t>• Без межузлового канала — воспроизведение проблемы</a:t>
+            </a:r>
+          </a:p>
+          <a:p>
+            <a:pPr algn="l"/>
+            <a:r>
+              <a:rPr lang="ru-RU" sz="1500" b="0">
                 <a:solidFill>
                   <a:srgbClr val="18212B"/>
                 </a:solidFill>
@@ -2353,20 +2353,20 @@
           <a:p>
             <a:pPr algn="l"/>
             <a:r>
-              <a:rPr lang="ru-RU" sz="1500" b="1">
-                <a:solidFill>
-                  <a:srgbClr val="18212B"/>
-                </a:solidFill>
-                <a:latin typeface="Aptos"/>
-                <a:cs typeface="Aptos"/>
-              </a:rPr>
-              <a:t>• Multi-instance с Redis backplane — проверка решения</a:t>
-            </a:r>
-          </a:p>
-          <a:p>
-            <a:pPr algn="l"/>
-            <a:r>
-              <a:rPr lang="ru-RU" sz="1500" b="1">
+              <a:rPr lang="ru-RU" sz="1500" b="0">
+                <a:solidFill>
+                  <a:srgbClr val="18212B"/>
+                </a:solidFill>
+                <a:latin typeface="Aptos"/>
+                <a:cs typeface="Aptos"/>
+              </a:rPr>
+              <a:t>• С межузловым каналом — проверка решения</a:t>
+            </a:r>
+          </a:p>
+          <a:p>
+            <a:pPr algn="l"/>
+            <a:r>
+              <a:rPr lang="ru-RU" sz="1500" b="0">
                 <a:solidFill>
                   <a:srgbClr val="18212B"/>
                 </a:solidFill>
@@ -2379,14 +2379,14 @@
           <a:p>
             <a:pPr algn="l"/>
             <a:r>
-              <a:rPr lang="ru-RU" sz="1500" b="1">
-                <a:solidFill>
-                  <a:srgbClr val="18212B"/>
-                </a:solidFill>
-                <a:latin typeface="Aptos"/>
-                <a:cs typeface="Aptos"/>
-              </a:rPr>
-              <a:t>Один и тот же код, один и тот же сценарий; отличие — значение REDIS_CONNECTION_STRING.</a:t>
+              <a:rPr lang="ru-RU" sz="1500" b="0">
+                <a:solidFill>
+                  <a:srgbClr val="18212B"/>
+                </a:solidFill>
+                <a:latin typeface="Aptos"/>
+                <a:cs typeface="Aptos"/>
+              </a:rPr>
+              <a:t>Один и тот же код, один и тот же сценарий; отличие — наличие Redis backplane.</a:t>
             </a:r>
           </a:p>
         </p:txBody>
@@ -2453,7 +2453,7 @@
                 <a:latin typeface="Aptos"/>
                 <a:cs typeface="Aptos"/>
               </a:rPr>
-              <a:t>• Одиночная cross-node доставка</a:t>
+              <a:t>• Одиночная доставка между узлами</a:t>
             </a:r>
           </a:p>
           <a:p>
@@ -2479,7 +2479,7 @@
                 <a:latin typeface="Aptos"/>
                 <a:cs typeface="Aptos"/>
               </a:rPr>
-              <a:t>• Серия из 5 итераций (THESIS_ITERATIONS)</a:t>
+              <a:t>• Серия из пяти итераций</a:t>
             </a:r>
           </a:p>
           <a:p>
@@ -2505,7 +2505,7 @@
                 <a:latin typeface="Aptos"/>
                 <a:cs typeface="Aptos"/>
               </a:rPr>
-              <a:t>• Rejoin после разрыва соединения</a:t>
+              <a:t>• Восстановление подписки после разрыва</a:t>
             </a:r>
           </a:p>
           <a:p>
@@ -2531,7 +2531,7 @@
                 <a:latin typeface="Aptos"/>
                 <a:cs typeface="Aptos"/>
               </a:rPr>
-              <a:t>• Failover после остановки узла</a:t>
+              <a:t>• Переключение на другой узел после отказа</a:t>
             </a:r>
           </a:p>
         </p:txBody>
@@ -3068,7 +3068,7 @@
                 <a:latin typeface="Aptos"/>
                 <a:cs typeface="Aptos"/>
               </a:rPr>
-              <a:t>Повторяемость, повторное вступление в группу и восстановление после отказа узла</a:t>
+              <a:t>Повторяемость, восстановление подписки и переключение после отказа узла</a:t>
             </a:r>
           </a:p>
         </p:txBody>
@@ -3082,164 +3082,6 @@
         <p:spPr>
           <a:xfrm>
             <a:off x="685800" y="1600200"/>
-            <a:ext cx="3657600" cy="4114800"/>
-          </a:xfrm>
-          <a:prstGeom prst="roundRect">
-            <a:avLst/>
-          </a:prstGeom>
-          <a:solidFill>
-            <a:srgbClr val="E8F3F1"/>
-          </a:solidFill>
-          <a:ln w="12700">
-            <a:solidFill>
-              <a:srgbClr val="0B6E69"/>
-            </a:solidFill>
-          </a:ln>
-        </p:spPr>
-        <p:txBody>
-          <a:bodyPr wrap="square" lIns="177800" tIns="177800" rIns="177800" bIns="177800"/>
-          <a:lstStyle/>
-          <a:p>
-            <a:pPr algn="l"/>
-            <a:r>
-              <a:rPr lang="ru-RU" sz="1500" b="0">
-                <a:solidFill>
-                  <a:srgbClr val="18212B"/>
-                </a:solidFill>
-                <a:latin typeface="Aptos"/>
-                <a:cs typeface="Aptos"/>
-              </a:rPr>
-              <a:t>Серия 5 итераций</a:t>
-            </a:r>
-          </a:p>
-          <a:p>
-            <a:pPr algn="l"/>
-            <a:r>
-              <a:rPr lang="ru-RU" sz="1500" b="0">
-                <a:solidFill>
-                  <a:srgbClr val="18212B"/>
-                </a:solidFill>
-                <a:latin typeface="Aptos"/>
-                <a:cs typeface="Aptos"/>
-              </a:rPr>
-              <a:t/>
-            </a:r>
-          </a:p>
-          <a:p>
-            <a:pPr algn="l"/>
-            <a:r>
-              <a:rPr lang="ru-RU" sz="1500" b="0">
-                <a:solidFill>
-                  <a:srgbClr val="18212B"/>
-                </a:solidFill>
-                <a:latin typeface="Aptos"/>
-                <a:cs typeface="Aptos"/>
-              </a:rPr>
-              <a:t>successful 5 / 5</a:t>
-            </a:r>
-          </a:p>
-          <a:p>
-            <a:pPr algn="l"/>
-            <a:r>
-              <a:rPr lang="ru-RU" sz="1500" b="0">
-                <a:solidFill>
-                  <a:srgbClr val="18212B"/>
-                </a:solidFill>
-                <a:latin typeface="Aptos"/>
-                <a:cs typeface="Aptos"/>
-              </a:rPr>
-              <a:t/>
-            </a:r>
-          </a:p>
-          <a:p>
-            <a:pPr algn="l"/>
-            <a:r>
-              <a:rPr lang="ru-RU" sz="1500" b="0">
-                <a:solidFill>
-                  <a:srgbClr val="18212B"/>
-                </a:solidFill>
-                <a:latin typeface="Aptos"/>
-                <a:cs typeface="Aptos"/>
-              </a:rPr>
-              <a:t>min 5,5 мс</a:t>
-            </a:r>
-          </a:p>
-          <a:p>
-            <a:pPr algn="l"/>
-            <a:r>
-              <a:rPr lang="ru-RU" sz="1500" b="0">
-                <a:solidFill>
-                  <a:srgbClr val="18212B"/>
-                </a:solidFill>
-                <a:latin typeface="Aptos"/>
-                <a:cs typeface="Aptos"/>
-              </a:rPr>
-              <a:t>avg 8,4 мс</a:t>
-            </a:r>
-          </a:p>
-          <a:p>
-            <a:pPr algn="l"/>
-            <a:r>
-              <a:rPr lang="ru-RU" sz="1500" b="0">
-                <a:solidFill>
-                  <a:srgbClr val="18212B"/>
-                </a:solidFill>
-                <a:latin typeface="Aptos"/>
-                <a:cs typeface="Aptos"/>
-              </a:rPr>
-              <a:t>p50 9,1 мс</a:t>
-            </a:r>
-          </a:p>
-          <a:p>
-            <a:pPr algn="l"/>
-            <a:r>
-              <a:rPr lang="ru-RU" sz="1500" b="0">
-                <a:solidFill>
-                  <a:srgbClr val="18212B"/>
-                </a:solidFill>
-                <a:latin typeface="Aptos"/>
-                <a:cs typeface="Aptos"/>
-              </a:rPr>
-              <a:t>p95 11,6 мс</a:t>
-            </a:r>
-          </a:p>
-          <a:p>
-            <a:pPr algn="l"/>
-            <a:r>
-              <a:rPr lang="ru-RU" sz="1500" b="0">
-                <a:solidFill>
-                  <a:srgbClr val="18212B"/>
-                </a:solidFill>
-                <a:latin typeface="Aptos"/>
-                <a:cs typeface="Aptos"/>
-              </a:rPr>
-              <a:t/>
-            </a:r>
-          </a:p>
-          <a:p>
-            <a:pPr algn="l"/>
-            <a:r>
-              <a:rPr lang="ru-RU" sz="1500" b="0">
-                <a:solidFill>
-                  <a:srgbClr val="18212B"/>
-                </a:solidFill>
-                <a:latin typeface="Aptos"/>
-                <a:cs typeface="Aptos"/>
-              </a:rPr>
-              <a:t>Подтверждена повторяемость доставки.</a:t>
-            </a:r>
-          </a:p>
-        </p:txBody>
-      </p:sp>
-      <p:sp>
-        <p:nvSpPr>
-          <p:cNvPr id="21" name="Shape 21"/>
-          <p:cNvSpPr txBox="1"/>
-          <p:nvPr/>
-        </p:nvSpPr>
-        <p:spPr>
-          <a:xfrm>
-            <a:off x="4434840" y="1600200"/>
             <a:ext cx="3657600" cy="4114800"/>
           </a:xfrm>
           <a:prstGeom prst="roundRect">
@@ -3267,7 +3109,7 @@
                 <a:latin typeface="Aptos"/>
                 <a:cs typeface="Aptos"/>
               </a:rPr>
-              <a:t>Rejoin после разрыва</a:t>
+              <a:t>Серия из 5 итераций</a:t>
             </a:r>
           </a:p>
           <a:p>
@@ -3293,20 +3135,7 @@
                 <a:latin typeface="Aptos"/>
                 <a:cs typeface="Aptos"/>
               </a:rPr>
-              <a:t>Новый connectionId</a:t>
-            </a:r>
-          </a:p>
-          <a:p>
-            <a:pPr algn="l"/>
-            <a:r>
-              <a:rPr lang="ru-RU" sz="1500" b="0">
-                <a:solidFill>
-                  <a:srgbClr val="18212B"/>
-                </a:solidFill>
-                <a:latin typeface="Aptos"/>
-                <a:cs typeface="Aptos"/>
-              </a:rPr>
-              <a:t>повторный JoinReportGroupAsync</a:t>
+              <a:t>Успешно: 5 из 5</a:t>
             </a:r>
           </a:p>
           <a:p>
@@ -3332,20 +3161,46 @@
                 <a:latin typeface="Aptos"/>
                 <a:cs typeface="Aptos"/>
               </a:rPr>
-              <a:t>rejoin 12,9 мс</a:t>
-            </a:r>
-          </a:p>
-          <a:p>
-            <a:pPr algn="l"/>
-            <a:r>
-              <a:rPr lang="ru-RU" sz="1500" b="0">
-                <a:solidFill>
-                  <a:srgbClr val="18212B"/>
-                </a:solidFill>
-                <a:latin typeface="Aptos"/>
-                <a:cs typeface="Aptos"/>
-              </a:rPr>
-              <a:t>delivery 6,6 мс</a:t>
+              <a:t>min 5,5 мс</a:t>
+            </a:r>
+          </a:p>
+          <a:p>
+            <a:pPr algn="l"/>
+            <a:r>
+              <a:rPr lang="ru-RU" sz="1500" b="0">
+                <a:solidFill>
+                  <a:srgbClr val="18212B"/>
+                </a:solidFill>
+                <a:latin typeface="Aptos"/>
+                <a:cs typeface="Aptos"/>
+              </a:rPr>
+              <a:t>avg 8,4 мс</a:t>
+            </a:r>
+          </a:p>
+          <a:p>
+            <a:pPr algn="l"/>
+            <a:r>
+              <a:rPr lang="ru-RU" sz="1500" b="0">
+                <a:solidFill>
+                  <a:srgbClr val="18212B"/>
+                </a:solidFill>
+                <a:latin typeface="Aptos"/>
+                <a:cs typeface="Aptos"/>
+              </a:rPr>
+              <a:t>p50 9,1 мс</a:t>
+            </a:r>
+          </a:p>
+          <a:p>
+            <a:pPr algn="l"/>
+            <a:r>
+              <a:rPr lang="ru-RU" sz="1500" b="0">
+                <a:solidFill>
+                  <a:srgbClr val="18212B"/>
+                </a:solidFill>
+                <a:latin typeface="Aptos"/>
+                <a:cs typeface="Aptos"/>
+              </a:rPr>
+              <a:t>p95 11,6 мс</a:t>
             </a:r>
           </a:p>
           <a:p>
@@ -3371,20 +3226,20 @@
                 <a:latin typeface="Aptos"/>
                 <a:cs typeface="Aptos"/>
               </a:rPr>
-              <a:t>Подтверждена повторная подписка.</a:t>
-            </a:r>
-          </a:p>
-        </p:txBody>
-      </p:sp>
-      <p:sp>
-        <p:nvSpPr>
-          <p:cNvPr id="22" name="Shape 22"/>
-          <p:cNvSpPr txBox="1"/>
-          <p:nvPr/>
-        </p:nvSpPr>
-        <p:spPr>
-          <a:xfrm>
-            <a:off x="8183880" y="1600200"/>
+              <a:t>Подтверждена повторяемость доставки.</a:t>
+            </a:r>
+          </a:p>
+        </p:txBody>
+      </p:sp>
+      <p:sp>
+        <p:nvSpPr>
+          <p:cNvPr id="21" name="Shape 21"/>
+          <p:cNvSpPr txBox="1"/>
+          <p:nvPr/>
+        </p:nvSpPr>
+        <p:spPr>
+          <a:xfrm>
+            <a:off x="4434840" y="1600200"/>
             <a:ext cx="3657600" cy="4114800"/>
           </a:xfrm>
           <a:prstGeom prst="roundRect">
@@ -3412,7 +3267,7 @@
                 <a:latin typeface="Aptos"/>
                 <a:cs typeface="Aptos"/>
               </a:rPr>
-              <a:t>Failover узла</a:t>
+              <a:t>Восстановление подписки</a:t>
             </a:r>
           </a:p>
           <a:p>
@@ -3438,20 +3293,7 @@
                 <a:latin typeface="Aptos"/>
                 <a:cs typeface="Aptos"/>
               </a:rPr>
-              <a:t>Контейнер app-api-2 остановлен</a:t>
-            </a:r>
-          </a:p>
-          <a:p>
-            <a:pPr algn="l"/>
-            <a:r>
-              <a:rPr lang="ru-RU" sz="1500" b="0">
-                <a:solidFill>
-                  <a:srgbClr val="18212B"/>
-                </a:solidFill>
-                <a:latin typeface="Aptos"/>
-                <a:cs typeface="Aptos"/>
-              </a:rPr>
-              <a:t>клиент переподключился через nginx к app-api-1</a:t>
+              <a:t>После разрыва клиент создаёт новое соединение и снова вступает в группу отчёта.</a:t>
             </a:r>
           </a:p>
           <a:p>
@@ -3477,20 +3319,20 @@
                 <a:latin typeface="Aptos"/>
                 <a:cs typeface="Aptos"/>
               </a:rPr>
-              <a:t>reconnect 240,3 мс</a:t>
-            </a:r>
-          </a:p>
-          <a:p>
-            <a:pPr algn="l"/>
-            <a:r>
-              <a:rPr lang="ru-RU" sz="1500" b="0">
-                <a:solidFill>
-                  <a:srgbClr val="18212B"/>
-                </a:solidFill>
-                <a:latin typeface="Aptos"/>
-                <a:cs typeface="Aptos"/>
-              </a:rPr>
-              <a:t>delivery 7,3 мс</a:t>
+              <a:t>переподключение 12,9 мс</a:t>
+            </a:r>
+          </a:p>
+          <a:p>
+            <a:pPr algn="l"/>
+            <a:r>
+              <a:rPr lang="ru-RU" sz="1500" b="0">
+                <a:solidFill>
+                  <a:srgbClr val="18212B"/>
+                </a:solidFill>
+                <a:latin typeface="Aptos"/>
+                <a:cs typeface="Aptos"/>
+              </a:rPr>
+              <a:t>доставка 6,6 мс</a:t>
             </a:r>
           </a:p>
           <a:p>
@@ -3516,7 +3358,139 @@
                 <a:latin typeface="Aptos"/>
                 <a:cs typeface="Aptos"/>
               </a:rPr>
-              <a:t>Подтверждено восстановление после отказа узла.</a:t>
+              <a:t>Подтверждена повторная подписка.</a:t>
+            </a:r>
+          </a:p>
+        </p:txBody>
+      </p:sp>
+      <p:sp>
+        <p:nvSpPr>
+          <p:cNvPr id="22" name="Shape 22"/>
+          <p:cNvSpPr txBox="1"/>
+          <p:nvPr/>
+        </p:nvSpPr>
+        <p:spPr>
+          <a:xfrm>
+            <a:off x="8183880" y="1600200"/>
+            <a:ext cx="3657600" cy="4114800"/>
+          </a:xfrm>
+          <a:prstGeom prst="roundRect">
+            <a:avLst/>
+          </a:prstGeom>
+          <a:solidFill>
+            <a:srgbClr val="FFFFFF"/>
+          </a:solidFill>
+          <a:ln w="12700">
+            <a:solidFill>
+              <a:srgbClr val="D7D2C7"/>
+            </a:solidFill>
+          </a:ln>
+        </p:spPr>
+        <p:txBody>
+          <a:bodyPr wrap="square" lIns="177800" tIns="177800" rIns="177800" bIns="177800"/>
+          <a:lstStyle/>
+          <a:p>
+            <a:pPr algn="l"/>
+            <a:r>
+              <a:rPr lang="ru-RU" sz="1500" b="0">
+                <a:solidFill>
+                  <a:srgbClr val="18212B"/>
+                </a:solidFill>
+                <a:latin typeface="Aptos"/>
+                <a:cs typeface="Aptos"/>
+              </a:rPr>
+              <a:t>Переключение после отказа узла</a:t>
+            </a:r>
+          </a:p>
+          <a:p>
+            <a:pPr algn="l"/>
+            <a:r>
+              <a:rPr lang="ru-RU" sz="1500" b="0">
+                <a:solidFill>
+                  <a:srgbClr val="18212B"/>
+                </a:solidFill>
+                <a:latin typeface="Aptos"/>
+                <a:cs typeface="Aptos"/>
+              </a:rPr>
+              <a:t/>
+            </a:r>
+          </a:p>
+          <a:p>
+            <a:pPr algn="l"/>
+            <a:r>
+              <a:rPr lang="ru-RU" sz="1500" b="0">
+                <a:solidFill>
+                  <a:srgbClr val="18212B"/>
+                </a:solidFill>
+                <a:latin typeface="Aptos"/>
+                <a:cs typeface="Aptos"/>
+              </a:rPr>
+              <a:t>Один backend остановлен; nginx переключает клиента на другой экземпляр.</a:t>
+            </a:r>
+          </a:p>
+          <a:p>
+            <a:pPr algn="l"/>
+            <a:r>
+              <a:rPr lang="ru-RU" sz="1500" b="0">
+                <a:solidFill>
+                  <a:srgbClr val="18212B"/>
+                </a:solidFill>
+                <a:latin typeface="Aptos"/>
+                <a:cs typeface="Aptos"/>
+              </a:rPr>
+              <a:t/>
+            </a:r>
+          </a:p>
+          <a:p>
+            <a:pPr algn="l"/>
+            <a:r>
+              <a:rPr lang="ru-RU" sz="1500" b="0">
+                <a:solidFill>
+                  <a:srgbClr val="18212B"/>
+                </a:solidFill>
+                <a:latin typeface="Aptos"/>
+                <a:cs typeface="Aptos"/>
+              </a:rPr>
+              <a:t>переподключение 240,3 мс</a:t>
+            </a:r>
+          </a:p>
+          <a:p>
+            <a:pPr algn="l"/>
+            <a:r>
+              <a:rPr lang="ru-RU" sz="1500" b="0">
+                <a:solidFill>
+                  <a:srgbClr val="18212B"/>
+                </a:solidFill>
+                <a:latin typeface="Aptos"/>
+                <a:cs typeface="Aptos"/>
+              </a:rPr>
+              <a:t>доставка 7,3 мс</a:t>
+            </a:r>
+          </a:p>
+          <a:p>
+            <a:pPr algn="l"/>
+            <a:r>
+              <a:rPr lang="ru-RU" sz="1500" b="0">
+                <a:solidFill>
+                  <a:srgbClr val="18212B"/>
+                </a:solidFill>
+                <a:latin typeface="Aptos"/>
+                <a:cs typeface="Aptos"/>
+              </a:rPr>
+              <a:t/>
+            </a:r>
+          </a:p>
+          <a:p>
+            <a:pPr algn="l"/>
+            <a:r>
+              <a:rPr lang="ru-RU" sz="1500" b="0">
+                <a:solidFill>
+                  <a:srgbClr val="18212B"/>
+                </a:solidFill>
+                <a:latin typeface="Aptos"/>
+                <a:cs typeface="Aptos"/>
+              </a:rPr>
+              <a:t>Подтверждено восстановление после отказа.</a:t>
             </a:r>
           </a:p>
         </p:txBody>
@@ -3637,7 +3611,7 @@
         <p:spPr>
           <a:xfrm>
             <a:off x="685800" y="1554480"/>
-            <a:ext cx="10835640" cy="1371600"/>
+            <a:ext cx="10835640" cy="1280160"/>
           </a:xfrm>
           <a:prstGeom prst="roundRect">
             <a:avLst/>
@@ -3657,7 +3631,7 @@
           <a:p>
             <a:pPr algn="ctr"/>
             <a:r>
-              <a:rPr lang="ru-RU" sz="1800" b="1">
+              <a:rPr lang="ru-RU" sz="1700" b="1">
                 <a:solidFill>
                   <a:srgbClr val="18212B"/>
                 </a:solidFill>
@@ -3677,8 +3651,49 @@
         </p:nvSpPr>
         <p:spPr>
           <a:xfrm>
-            <a:off x="685800" y="3108960"/>
-            <a:ext cx="3520440" cy="2606040"/>
+            <a:off x="685800" y="2971800"/>
+            <a:ext cx="10835640" cy="1417320"/>
+          </a:xfrm>
+          <a:prstGeom prst="roundRect">
+            <a:avLst/>
+          </a:prstGeom>
+          <a:solidFill>
+            <a:srgbClr val="FFF3D8"/>
+          </a:solidFill>
+          <a:ln w="12700">
+            <a:solidFill>
+              <a:srgbClr val="C76F2E"/>
+            </a:solidFill>
+          </a:ln>
+        </p:spPr>
+        <p:txBody>
+          <a:bodyPr wrap="square" lIns="177800" tIns="177800" rIns="177800" bIns="177800"/>
+          <a:lstStyle/>
+          <a:p>
+            <a:pPr algn="ctr"/>
+            <a:r>
+              <a:rPr lang="ru-RU" sz="1500" b="1">
+                <a:solidFill>
+                  <a:srgbClr val="18212B"/>
+                </a:solidFill>
+                <a:latin typeface="Aptos"/>
+                <a:cs typeface="Aptos"/>
+              </a:rPr>
+              <a:t>Дополнительный эффект — повышение отказоустойчивости: при отказе одного узла клиенты продолжают получать события через другой экземпляр backend, тогда как single-node архитектура такой возможности не предоставляет.</a:t>
+            </a:r>
+          </a:p>
+        </p:txBody>
+      </p:sp>
+      <p:sp>
+        <p:nvSpPr>
+          <p:cNvPr id="22" name="Shape 22"/>
+          <p:cNvSpPr txBox="1"/>
+          <p:nvPr/>
+        </p:nvSpPr>
+        <p:spPr>
+          <a:xfrm>
+            <a:off x="685800" y="4572000"/>
+            <a:ext cx="3520440" cy="1691640"/>
           </a:xfrm>
           <a:prstGeom prst="roundRect">
             <a:avLst/>
@@ -3698,7 +3713,7 @@
           <a:p>
             <a:pPr algn="l"/>
             <a:r>
-              <a:rPr lang="ru-RU" sz="1400" b="1">
+              <a:rPr lang="ru-RU" sz="1300" b="1">
                 <a:solidFill>
                   <a:srgbClr val="18212B"/>
                 </a:solidFill>
@@ -3711,7 +3726,7 @@
           <a:p>
             <a:pPr algn="l"/>
             <a:r>
-              <a:rPr lang="ru-RU" sz="1400" b="1">
+              <a:rPr lang="ru-RU" sz="1300" b="1">
                 <a:solidFill>
                   <a:srgbClr val="18212B"/>
                 </a:solidFill>
@@ -3724,7 +3739,7 @@
           <a:p>
             <a:pPr algn="l"/>
             <a:r>
-              <a:rPr lang="ru-RU" sz="1400" b="1">
+              <a:rPr lang="ru-RU" sz="1300" b="1">
                 <a:solidFill>
                   <a:srgbClr val="18212B"/>
                 </a:solidFill>
@@ -3738,14 +3753,14 @@
       </p:sp>
       <p:sp>
         <p:nvSpPr>
-          <p:cNvPr id="22" name="Shape 22"/>
-          <p:cNvSpPr txBox="1"/>
-          <p:nvPr/>
-        </p:nvSpPr>
-        <p:spPr>
-          <a:xfrm>
-            <a:off x="4343400" y="3108960"/>
-            <a:ext cx="3520440" cy="2606040"/>
+          <p:cNvPr id="23" name="Shape 23"/>
+          <p:cNvSpPr txBox="1"/>
+          <p:nvPr/>
+        </p:nvSpPr>
+        <p:spPr>
+          <a:xfrm>
+            <a:off x="4343400" y="4572000"/>
+            <a:ext cx="3520440" cy="1691640"/>
           </a:xfrm>
           <a:prstGeom prst="roundRect">
             <a:avLst/>
@@ -3765,7 +3780,7 @@
           <a:p>
             <a:pPr algn="l"/>
             <a:r>
-              <a:rPr lang="ru-RU" sz="1400" b="1">
+              <a:rPr lang="ru-RU" sz="1300" b="1">
                 <a:solidFill>
                   <a:srgbClr val="18212B"/>
                 </a:solidFill>
@@ -3778,7 +3793,7 @@
           <a:p>
             <a:pPr algn="l"/>
             <a:r>
-              <a:rPr lang="ru-RU" sz="1400" b="1">
+              <a:rPr lang="ru-RU" sz="1300" b="1">
                 <a:solidFill>
                   <a:srgbClr val="18212B"/>
                 </a:solidFill>
@@ -3791,28 +3806,28 @@
           <a:p>
             <a:pPr algn="l"/>
             <a:r>
-              <a:rPr lang="ru-RU" sz="1400" b="1">
-                <a:solidFill>
-                  <a:srgbClr val="18212B"/>
-                </a:solidFill>
-                <a:latin typeface="Aptos"/>
-                <a:cs typeface="Aptos"/>
-              </a:rPr>
-              <a:t>SignalR + Redis backplane + nginx + два app-api; общий код, конфигурация через переменную окружения.</a:t>
-            </a:r>
-          </a:p>
-        </p:txBody>
-      </p:sp>
-      <p:sp>
-        <p:nvSpPr>
-          <p:cNvPr id="23" name="Shape 23"/>
-          <p:cNvSpPr txBox="1"/>
-          <p:nvPr/>
-        </p:nvSpPr>
-        <p:spPr>
-          <a:xfrm>
-            <a:off x="8001000" y="3108960"/>
-            <a:ext cx="3520440" cy="2606040"/>
+              <a:rPr lang="ru-RU" sz="1300" b="1">
+                <a:solidFill>
+                  <a:srgbClr val="18212B"/>
+                </a:solidFill>
+                <a:latin typeface="Aptos"/>
+                <a:cs typeface="Aptos"/>
+              </a:rPr>
+              <a:t>Несколько экземпляров backend за nginx + Redis backplane; общий код, переключение режима — переменной окружения.</a:t>
+            </a:r>
+          </a:p>
+        </p:txBody>
+      </p:sp>
+      <p:sp>
+        <p:nvSpPr>
+          <p:cNvPr id="24" name="Shape 24"/>
+          <p:cNvSpPr txBox="1"/>
+          <p:nvPr/>
+        </p:nvSpPr>
+        <p:spPr>
+          <a:xfrm>
+            <a:off x="8001000" y="4572000"/>
+            <a:ext cx="3520440" cy="1691640"/>
           </a:xfrm>
           <a:prstGeom prst="roundRect">
             <a:avLst/>
@@ -3832,7 +3847,7 @@
           <a:p>
             <a:pPr algn="l"/>
             <a:r>
-              <a:rPr lang="ru-RU" sz="1400" b="1">
+              <a:rPr lang="ru-RU" sz="1300" b="1">
                 <a:solidFill>
                   <a:srgbClr val="18212B"/>
                 </a:solidFill>
@@ -3845,7 +3860,7 @@
           <a:p>
             <a:pPr algn="l"/>
             <a:r>
-              <a:rPr lang="ru-RU" sz="1400" b="1">
+              <a:rPr lang="ru-RU" sz="1300" b="1">
                 <a:solidFill>
                   <a:srgbClr val="18212B"/>
                 </a:solidFill>
@@ -3858,14 +3873,14 @@
           <a:p>
             <a:pPr algn="l"/>
             <a:r>
-              <a:rPr lang="ru-RU" sz="1400" b="1">
-                <a:solidFill>
-                  <a:srgbClr val="18212B"/>
-                </a:solidFill>
-                <a:latin typeface="Aptos"/>
-                <a:cs typeface="Aptos"/>
-              </a:rPr>
-              <a:t>Delivery (без / с) · серия 5 / 5 · rejoin · failover — воспроизводимый Docker Compose стенд.</a:t>
+              <a:rPr lang="ru-RU" sz="1300" b="1">
+                <a:solidFill>
+                  <a:srgbClr val="18212B"/>
+                </a:solidFill>
+                <a:latin typeface="Aptos"/>
+                <a:cs typeface="Aptos"/>
+              </a:rPr>
+              <a:t>Доставка (без / с) · серия · восстановление подписки · переключение после отказа.</a:t>
             </a:r>
           </a:p>
         </p:txBody>
